--- a/tema2/diapositivas/seguridad-basica-http-basic.pptx
+++ b/tema2/diapositivas/seguridad-basica-http-basic.pptx
@@ -4,6 +4,9 @@
   <p:sldMasterIdLst>
     <p:sldMasterId id="2147483648" r:id="rId1"/>
   </p:sldMasterIdLst>
+  <p:notesMasterIdLst>
+    <p:notesMasterId r:id="rId32"/>
+  </p:notesMasterIdLst>
   <p:sldIdLst>
     <p:sldId id="256" r:id="rId2"/>
     <p:sldId id="257" r:id="rId3"/>
@@ -36,9 +39,6 @@
     <p:sldId id="284" r:id="rId30"/>
     <p:sldId id="285" r:id="rId31"/>
   </p:sldIdLst>
-  <p:notesMasterIdLst>
-    <p:notesMasterId r:id="rId32"/>
-  </p:notesMasterIdLst>
   <p:sldSz cx="12192000" cy="6858000"/>
   <p:notesSz cx="6858000" cy="12192000"/>
   <p:defaultTextStyle>
@@ -133,6 +133,11 @@
       </a:defRPr>
     </a:lvl9pPr>
   </p:defaultTextStyle>
+  <p:extLst>
+    <p:ext uri="{EFAFB233-063F-42B5-8137-9DF3F51BA10A}">
+      <p15:sldGuideLst xmlns:p15="http://schemas.microsoft.com/office/powerpoint/2012/main"/>
+    </p:ext>
+  </p:extLst>
 </p:presentation>
 </file>
 
@@ -158,234 +163,10 @@
           <a:chExt cx="0" cy="0"/>
         </a:xfrm>
       </p:grpSpPr>
-      <p:sp>
-        <p:nvSpPr>
-          <p:cNvPr id="2" name="Header Placeholder 1"/>
-          <p:cNvSpPr>
-            <a:spLocks noGrp="1"/>
-          </p:cNvSpPr>
-          <p:nvPr>
-            <p:ph type="hdr" sz="quarter"/>
-          </p:nvPr>
-        </p:nvSpPr>
-        <p:spPr>
-          <a:xfrm>
-            <a:off x="0" y="0"/>
-            <a:ext cx="2971800" cy="458788"/>
-          </a:xfrm>
-          <a:prstGeom prst="rect">
-            <a:avLst/>
-          </a:prstGeom>
-        </p:spPr>
-        <p:txBody>
-          <a:bodyPr vert="horz" lIns="91440" tIns="45720" rIns="91440" bIns="45720" rtlCol="0"/>
-          <a:lstStyle>
-            <a:lvl1pPr algn="l">
-              <a:defRPr sz="1200"/>
-            </a:lvl1pPr>
-          </a:lstStyle>
-          <a:p>
-            <a:endParaRPr lang="en-US"/>
-          </a:p>
-        </p:txBody>
-      </p:sp>
-      <p:sp>
-        <p:nvSpPr>
-          <p:cNvPr id="3" name="Date Placeholder 2"/>
-          <p:cNvSpPr>
-            <a:spLocks noGrp="1"/>
-          </p:cNvSpPr>
-          <p:nvPr>
-            <p:ph type="dt" idx="1"/>
-          </p:nvPr>
-        </p:nvSpPr>
-        <p:spPr>
-          <a:xfrm>
-            <a:off x="3884613" y="0"/>
-            <a:ext cx="2971800" cy="458788"/>
-          </a:xfrm>
-          <a:prstGeom prst="rect">
-            <a:avLst/>
-          </a:prstGeom>
-        </p:spPr>
-        <p:txBody>
-          <a:bodyPr vert="horz" lIns="91440" tIns="45720" rIns="91440" bIns="45720" rtlCol="0"/>
-          <a:lstStyle>
-            <a:lvl1pPr algn="r">
-              <a:defRPr sz="1200"/>
-            </a:lvl1pPr>
-          </a:lstStyle>
-          <a:p>
-            <a:fld id="{5282F153-3F37-0F45-9E97-73ACFA13230C}" type="datetimeFigureOut">
-              <a:rPr lang="en-US"/>
-              <a:t>7/23/19</a:t>
-            </a:fld>
-            <a:endParaRPr lang="en-US"/>
-          </a:p>
-        </p:txBody>
-      </p:sp>
-      <p:sp>
-        <p:nvSpPr>
-          <p:cNvPr id="4" name="Slide Image Placeholder 3"/>
-          <p:cNvSpPr>
-            <a:spLocks noGrp="1" noRot="1" noChangeAspect="1"/>
-          </p:cNvSpPr>
-          <p:nvPr>
-            <p:ph type="sldImg" idx="2"/>
-          </p:nvPr>
-        </p:nvSpPr>
-        <p:spPr>
-          <a:xfrm>
-            <a:off x="685800" y="1143000"/>
-            <a:ext cx="5486400" cy="3086100"/>
-          </a:xfrm>
-          <a:prstGeom prst="rect">
-            <a:avLst/>
-          </a:prstGeom>
-          <a:noFill/>
-          <a:ln w="12700">
-            <a:solidFill>
-              <a:prstClr val="black"/>
-            </a:solidFill>
-          </a:ln>
-        </p:spPr>
-        <p:txBody>
-          <a:bodyPr vert="horz" lIns="91440" tIns="45720" rIns="91440" bIns="45720" rtlCol="0" anchor="ctr"/>
-          <a:lstStyle/>
-          <a:p>
-            <a:endParaRPr lang="en-US"/>
-          </a:p>
-        </p:txBody>
-      </p:sp>
-      <p:sp>
-        <p:nvSpPr>
-          <p:cNvPr id="5" name="Notes Placeholder 4"/>
-          <p:cNvSpPr>
-            <a:spLocks noGrp="1"/>
-          </p:cNvSpPr>
-          <p:nvPr>
-            <p:ph type="body" sz="quarter" idx="3"/>
-          </p:nvPr>
-        </p:nvSpPr>
-        <p:spPr>
-          <a:xfrm>
-            <a:off x="685800" y="4400550"/>
-            <a:ext cx="5486400" cy="3600450"/>
-          </a:xfrm>
-          <a:prstGeom prst="rect">
-            <a:avLst/>
-          </a:prstGeom>
-        </p:spPr>
-        <p:txBody>
-          <a:bodyPr vert="horz" lIns="91440" tIns="45720" rIns="91440" bIns="45720" rtlCol="0"/>
-          <a:lstStyle/>
-          <a:p>
-            <a:pPr lvl="0"/>
-            <a:r>
-              <a:rPr lang="en-US"/>
-              <a:t>Click to edit Master text styles</a:t>
-            </a:r>
-          </a:p>
-          <a:p>
-            <a:pPr lvl="1"/>
-            <a:r>
-              <a:rPr lang="en-US"/>
-              <a:t>Second level</a:t>
-            </a:r>
-          </a:p>
-          <a:p>
-            <a:pPr lvl="2"/>
-            <a:r>
-              <a:rPr lang="en-US"/>
-              <a:t>Third level</a:t>
-            </a:r>
-          </a:p>
-          <a:p>
-            <a:pPr lvl="3"/>
-            <a:r>
-              <a:rPr lang="en-US"/>
-              <a:t>Fourth level</a:t>
-            </a:r>
-          </a:p>
-          <a:p>
-            <a:pPr lvl="4"/>
-            <a:r>
-              <a:rPr lang="en-US"/>
-              <a:t>Fifth level</a:t>
-            </a:r>
-          </a:p>
-        </p:txBody>
-      </p:sp>
-      <p:sp>
-        <p:nvSpPr>
-          <p:cNvPr id="6" name="Footer Placeholder 5"/>
-          <p:cNvSpPr>
-            <a:spLocks noGrp="1"/>
-          </p:cNvSpPr>
-          <p:nvPr>
-            <p:ph type="ftr" sz="quarter" idx="4"/>
-          </p:nvPr>
-        </p:nvSpPr>
-        <p:spPr>
-          <a:xfrm>
-            <a:off x="0" y="8685213"/>
-            <a:ext cx="2971800" cy="458787"/>
-          </a:xfrm>
-          <a:prstGeom prst="rect">
-            <a:avLst/>
-          </a:prstGeom>
-        </p:spPr>
-        <p:txBody>
-          <a:bodyPr vert="horz" lIns="91440" tIns="45720" rIns="91440" bIns="45720" rtlCol="0" anchor="b"/>
-          <a:lstStyle>
-            <a:lvl1pPr algn="l">
-              <a:defRPr sz="1200"/>
-            </a:lvl1pPr>
-          </a:lstStyle>
-          <a:p>
-            <a:endParaRPr lang="en-US"/>
-          </a:p>
-        </p:txBody>
-      </p:sp>
-      <p:sp>
-        <p:nvSpPr>
-          <p:cNvPr id="7" name="Slide Number Placeholder 6"/>
-          <p:cNvSpPr>
-            <a:spLocks noGrp="1"/>
-          </p:cNvSpPr>
-          <p:nvPr>
-            <p:ph type="sldNum" sz="quarter" idx="5"/>
-          </p:nvPr>
-        </p:nvSpPr>
-        <p:spPr>
-          <a:xfrm>
-            <a:off x="3884613" y="8685213"/>
-            <a:ext cx="2971800" cy="458787"/>
-          </a:xfrm>
-          <a:prstGeom prst="rect">
-            <a:avLst/>
-          </a:prstGeom>
-        </p:spPr>
-        <p:txBody>
-          <a:bodyPr vert="horz" lIns="91440" tIns="45720" rIns="91440" bIns="45720" rtlCol="0" anchor="b"/>
-          <a:lstStyle>
-            <a:lvl1pPr algn="r">
-              <a:defRPr sz="1200"/>
-            </a:lvl1pPr>
-          </a:lstStyle>
-          <a:p>
-            <a:fld id="{CE5E9CC1-C706-0F49-92D6-E571CC5EEA8F}" type="slidenum">
-              <a:rPr lang="en-US"/>
-              <a:t>‹#›</a:t>
-            </a:fld>
-            <a:endParaRPr lang="en-US"/>
-          </a:p>
-        </p:txBody>
-      </p:sp>
     </p:spTree>
     <p:extLst>
       <p:ext uri="{BB962C8B-B14F-4D97-AF65-F5344CB8AC3E}">
-        <p14:creationId xmlns:p14="http://schemas.microsoft.com/office/powerpoint/2010/main" val="1024086991"/>
+        <p14:creationId xmlns:p14="http://schemas.microsoft.com/office/powerpoint/2010/main" val="3158383196"/>
       </p:ext>
     </p:extLst>
   </p:cSld>
@@ -529,10 +310,6 @@
           <a:bodyPr/>
           <a:lstStyle/>
           <a:p>
-            <a:r>
-              <a:rPr lang="en-US" dirty="0"/>
-              <a:t/>
-            </a:r>
             <a:endParaRPr lang="en-US" dirty="0"/>
           </a:p>
         </p:txBody>
@@ -617,10 +394,6 @@
           <a:bodyPr/>
           <a:lstStyle/>
           <a:p>
-            <a:r>
-              <a:rPr lang="en-US" dirty="0"/>
-              <a:t/>
-            </a:r>
             <a:endParaRPr lang="en-US" dirty="0"/>
           </a:p>
         </p:txBody>
@@ -705,10 +478,6 @@
           <a:bodyPr/>
           <a:lstStyle/>
           <a:p>
-            <a:r>
-              <a:rPr lang="en-US" dirty="0"/>
-              <a:t/>
-            </a:r>
             <a:endParaRPr lang="en-US" dirty="0"/>
           </a:p>
         </p:txBody>
@@ -793,10 +562,6 @@
           <a:bodyPr/>
           <a:lstStyle/>
           <a:p>
-            <a:r>
-              <a:rPr lang="en-US" dirty="0"/>
-              <a:t/>
-            </a:r>
             <a:endParaRPr lang="en-US" dirty="0"/>
           </a:p>
         </p:txBody>
@@ -881,10 +646,6 @@
           <a:bodyPr/>
           <a:lstStyle/>
           <a:p>
-            <a:r>
-              <a:rPr lang="en-US" dirty="0"/>
-              <a:t/>
-            </a:r>
             <a:endParaRPr lang="en-US" dirty="0"/>
           </a:p>
         </p:txBody>
@@ -969,10 +730,6 @@
           <a:bodyPr/>
           <a:lstStyle/>
           <a:p>
-            <a:r>
-              <a:rPr lang="en-US" dirty="0"/>
-              <a:t/>
-            </a:r>
             <a:endParaRPr lang="en-US" dirty="0"/>
           </a:p>
         </p:txBody>
@@ -1057,10 +814,6 @@
           <a:bodyPr/>
           <a:lstStyle/>
           <a:p>
-            <a:r>
-              <a:rPr lang="en-US" dirty="0"/>
-              <a:t/>
-            </a:r>
             <a:endParaRPr lang="en-US" dirty="0"/>
           </a:p>
         </p:txBody>
@@ -1145,10 +898,6 @@
           <a:bodyPr/>
           <a:lstStyle/>
           <a:p>
-            <a:r>
-              <a:rPr lang="en-US" dirty="0"/>
-              <a:t/>
-            </a:r>
             <a:endParaRPr lang="en-US" dirty="0"/>
           </a:p>
         </p:txBody>
@@ -1233,10 +982,6 @@
           <a:bodyPr/>
           <a:lstStyle/>
           <a:p>
-            <a:r>
-              <a:rPr lang="en-US" dirty="0"/>
-              <a:t/>
-            </a:r>
             <a:endParaRPr lang="en-US" dirty="0"/>
           </a:p>
         </p:txBody>
@@ -1321,10 +1066,6 @@
           <a:bodyPr/>
           <a:lstStyle/>
           <a:p>
-            <a:r>
-              <a:rPr lang="en-US" dirty="0"/>
-              <a:t/>
-            </a:r>
             <a:endParaRPr lang="en-US" dirty="0"/>
           </a:p>
         </p:txBody>
@@ -1409,10 +1150,6 @@
           <a:bodyPr/>
           <a:lstStyle/>
           <a:p>
-            <a:r>
-              <a:rPr lang="en-US" dirty="0"/>
-              <a:t/>
-            </a:r>
             <a:endParaRPr lang="en-US" dirty="0"/>
           </a:p>
         </p:txBody>
@@ -1497,10 +1234,6 @@
           <a:bodyPr/>
           <a:lstStyle/>
           <a:p>
-            <a:r>
-              <a:rPr lang="en-US" dirty="0"/>
-              <a:t/>
-            </a:r>
             <a:endParaRPr lang="en-US" dirty="0"/>
           </a:p>
         </p:txBody>
@@ -1585,10 +1318,6 @@
           <a:bodyPr/>
           <a:lstStyle/>
           <a:p>
-            <a:r>
-              <a:rPr lang="en-US" dirty="0"/>
-              <a:t/>
-            </a:r>
             <a:endParaRPr lang="en-US" dirty="0"/>
           </a:p>
         </p:txBody>
@@ -1673,10 +1402,6 @@
           <a:bodyPr/>
           <a:lstStyle/>
           <a:p>
-            <a:r>
-              <a:rPr lang="en-US" dirty="0"/>
-              <a:t/>
-            </a:r>
             <a:endParaRPr lang="en-US" dirty="0"/>
           </a:p>
         </p:txBody>
@@ -1761,10 +1486,6 @@
           <a:bodyPr/>
           <a:lstStyle/>
           <a:p>
-            <a:r>
-              <a:rPr lang="en-US" dirty="0"/>
-              <a:t/>
-            </a:r>
             <a:endParaRPr lang="en-US" dirty="0"/>
           </a:p>
         </p:txBody>
@@ -1849,10 +1570,6 @@
           <a:bodyPr/>
           <a:lstStyle/>
           <a:p>
-            <a:r>
-              <a:rPr lang="en-US" dirty="0"/>
-              <a:t/>
-            </a:r>
             <a:endParaRPr lang="en-US" dirty="0"/>
           </a:p>
         </p:txBody>
@@ -1937,10 +1654,6 @@
           <a:bodyPr/>
           <a:lstStyle/>
           <a:p>
-            <a:r>
-              <a:rPr lang="en-US" dirty="0"/>
-              <a:t/>
-            </a:r>
             <a:endParaRPr lang="en-US" dirty="0"/>
           </a:p>
         </p:txBody>
@@ -2025,10 +1738,6 @@
           <a:bodyPr/>
           <a:lstStyle/>
           <a:p>
-            <a:r>
-              <a:rPr lang="en-US" dirty="0"/>
-              <a:t/>
-            </a:r>
             <a:endParaRPr lang="en-US" dirty="0"/>
           </a:p>
         </p:txBody>
@@ -2113,10 +1822,6 @@
           <a:bodyPr/>
           <a:lstStyle/>
           <a:p>
-            <a:r>
-              <a:rPr lang="en-US" dirty="0"/>
-              <a:t/>
-            </a:r>
             <a:endParaRPr lang="en-US" dirty="0"/>
           </a:p>
         </p:txBody>
@@ -2201,10 +1906,6 @@
           <a:bodyPr/>
           <a:lstStyle/>
           <a:p>
-            <a:r>
-              <a:rPr lang="en-US" dirty="0"/>
-              <a:t/>
-            </a:r>
             <a:endParaRPr lang="en-US" dirty="0"/>
           </a:p>
         </p:txBody>
@@ -2289,10 +1990,6 @@
           <a:bodyPr/>
           <a:lstStyle/>
           <a:p>
-            <a:r>
-              <a:rPr lang="en-US" dirty="0"/>
-              <a:t/>
-            </a:r>
             <a:endParaRPr lang="en-US" dirty="0"/>
           </a:p>
         </p:txBody>
@@ -2377,10 +2074,6 @@
           <a:bodyPr/>
           <a:lstStyle/>
           <a:p>
-            <a:r>
-              <a:rPr lang="en-US" dirty="0"/>
-              <a:t/>
-            </a:r>
             <a:endParaRPr lang="en-US" dirty="0"/>
           </a:p>
         </p:txBody>
@@ -2465,10 +2158,6 @@
           <a:bodyPr/>
           <a:lstStyle/>
           <a:p>
-            <a:r>
-              <a:rPr lang="en-US" dirty="0"/>
-              <a:t/>
-            </a:r>
             <a:endParaRPr lang="en-US" dirty="0"/>
           </a:p>
         </p:txBody>
@@ -2553,10 +2242,6 @@
           <a:bodyPr/>
           <a:lstStyle/>
           <a:p>
-            <a:r>
-              <a:rPr lang="en-US" dirty="0"/>
-              <a:t/>
-            </a:r>
             <a:endParaRPr lang="en-US" dirty="0"/>
           </a:p>
         </p:txBody>
@@ -2641,10 +2326,6 @@
           <a:bodyPr/>
           <a:lstStyle/>
           <a:p>
-            <a:r>
-              <a:rPr lang="en-US" dirty="0"/>
-              <a:t/>
-            </a:r>
             <a:endParaRPr lang="en-US" dirty="0"/>
           </a:p>
         </p:txBody>
@@ -2729,10 +2410,6 @@
           <a:bodyPr/>
           <a:lstStyle/>
           <a:p>
-            <a:r>
-              <a:rPr lang="en-US" dirty="0"/>
-              <a:t/>
-            </a:r>
             <a:endParaRPr lang="en-US" dirty="0"/>
           </a:p>
         </p:txBody>
@@ -2817,10 +2494,6 @@
           <a:bodyPr/>
           <a:lstStyle/>
           <a:p>
-            <a:r>
-              <a:rPr lang="en-US" dirty="0"/>
-              <a:t/>
-            </a:r>
             <a:endParaRPr lang="en-US" dirty="0"/>
           </a:p>
         </p:txBody>
@@ -2905,10 +2578,6 @@
           <a:bodyPr/>
           <a:lstStyle/>
           <a:p>
-            <a:r>
-              <a:rPr lang="en-US" dirty="0"/>
-              <a:t/>
-            </a:r>
             <a:endParaRPr lang="en-US" dirty="0"/>
           </a:p>
         </p:txBody>
@@ -2993,10 +2662,6 @@
           <a:bodyPr/>
           <a:lstStyle/>
           <a:p>
-            <a:r>
-              <a:rPr lang="en-US" dirty="0"/>
-              <a:t/>
-            </a:r>
             <a:endParaRPr lang="en-US" dirty="0"/>
           </a:p>
         </p:txBody>
@@ -3081,10 +2746,6 @@
           <a:bodyPr/>
           <a:lstStyle/>
           <a:p>
-            <a:r>
-              <a:rPr lang="en-US" dirty="0"/>
-              <a:t/>
-            </a:r>
             <a:endParaRPr lang="en-US" dirty="0"/>
           </a:p>
         </p:txBody>
@@ -3158,6 +2819,11 @@
 <file path=ppt/slideMasters/slideMaster1.xml><?xml version="1.0" encoding="utf-8"?>
 <p:sldMaster xmlns:a="http://schemas.openxmlformats.org/drawingml/2006/main" xmlns:r="http://schemas.openxmlformats.org/officeDocument/2006/relationships" xmlns:p="http://schemas.openxmlformats.org/presentationml/2006/main">
   <p:cSld>
+    <p:bg>
+      <p:bgRef idx="1001">
+        <a:schemeClr val="bg1"/>
+      </p:bgRef>
+    </p:bg>
     <p:spTree>
       <p:nvGrpSpPr>
         <p:cNvPr id="1" name=""/>
@@ -3440,6 +3106,7 @@
         <a:solidFill>
           <a:srgbClr val="4E342E"/>
         </a:solidFill>
+        <a:effectLst/>
       </p:bgPr>
     </p:bg>
     <p:spTree>
@@ -3477,7 +3144,7 @@
           <a:bodyPr wrap="square" rtlCol="0" anchor="ctr"/>
           <a:lstStyle/>
           <a:p>
-            <a:pPr indent="0" marL="0">
+            <a:pPr marL="0" indent="0">
               <a:buNone/>
             </a:pPr>
             <a:r>
@@ -3516,7 +3183,7 @@
           <a:bodyPr wrap="square" rtlCol="0" anchor="ctr"/>
           <a:lstStyle/>
           <a:p>
-            <a:pPr algn="l" indent="0" marL="0">
+            <a:pPr marL="0" indent="0" algn="l">
               <a:buNone/>
             </a:pPr>
             <a:r>
@@ -3533,7 +3200,7 @@
             <a:endParaRPr lang="en-US" sz="3400" dirty="0"/>
           </a:p>
           <a:p>
-            <a:pPr algn="l" indent="0" marL="0">
+            <a:pPr marL="0" indent="0" algn="l">
               <a:buNone/>
             </a:pPr>
             <a:r>
@@ -3550,7 +3217,7 @@
             <a:endParaRPr lang="en-US" sz="3400" dirty="0"/>
           </a:p>
           <a:p>
-            <a:pPr algn="l" indent="0" marL="0">
+            <a:pPr marL="0" indent="0" algn="l">
               <a:buNone/>
             </a:pPr>
             <a:r>
@@ -3592,6 +3259,13 @@
             <a:prstDash val="solid"/>
           </a:ln>
         </p:spPr>
+        <p:txBody>
+          <a:bodyPr/>
+          <a:lstStyle/>
+          <a:p>
+            <a:endParaRPr lang="es-ES"/>
+          </a:p>
+        </p:txBody>
       </p:sp>
       <p:sp>
         <p:nvSpPr>
@@ -3614,7 +3288,7 @@
           <a:bodyPr wrap="square" rtlCol="0" anchor="ctr"/>
           <a:lstStyle/>
           <a:p>
-            <a:pPr indent="0" marL="0">
+            <a:pPr marL="0" indent="0">
               <a:buNone/>
             </a:pPr>
             <a:r>
@@ -3681,6 +3355,13 @@
             <a:prstDash val="solid"/>
           </a:ln>
         </p:spPr>
+        <p:txBody>
+          <a:bodyPr/>
+          <a:lstStyle/>
+          <a:p>
+            <a:endParaRPr lang="es-ES"/>
+          </a:p>
+        </p:txBody>
       </p:sp>
       <p:sp>
         <p:nvSpPr>
@@ -3703,7 +3384,7 @@
           <a:bodyPr wrap="square" rtlCol="0" anchor="ctr"/>
           <a:lstStyle/>
           <a:p>
-            <a:pPr indent="0" marL="0">
+            <a:pPr marL="0" indent="0">
               <a:buNone/>
             </a:pPr>
             <a:r>
@@ -3742,7 +3423,7 @@
           <a:bodyPr wrap="square" rtlCol="0" anchor="ctr"/>
           <a:lstStyle/>
           <a:p>
-            <a:pPr algn="r" indent="0" marL="0">
+            <a:pPr marL="0" indent="0" algn="r">
               <a:buNone/>
             </a:pPr>
             <a:r>
@@ -3784,6 +3465,13 @@
             <a:prstDash val="solid"/>
           </a:ln>
         </p:spPr>
+        <p:txBody>
+          <a:bodyPr/>
+          <a:lstStyle/>
+          <a:p>
+            <a:endParaRPr lang="es-ES"/>
+          </a:p>
+        </p:txBody>
       </p:sp>
       <p:sp>
         <p:nvSpPr>
@@ -3806,7 +3494,7 @@
           <a:bodyPr wrap="square" rtlCol="0" anchor="ctr"/>
           <a:lstStyle/>
           <a:p>
-            <a:pPr indent="0" marL="0">
+            <a:pPr marL="0" indent="0">
               <a:buNone/>
             </a:pPr>
             <a:r>
@@ -3873,6 +3561,13 @@
             <a:prstDash val="solid"/>
           </a:ln>
         </p:spPr>
+        <p:txBody>
+          <a:bodyPr/>
+          <a:lstStyle/>
+          <a:p>
+            <a:endParaRPr lang="es-ES"/>
+          </a:p>
+        </p:txBody>
       </p:sp>
       <p:sp>
         <p:nvSpPr>
@@ -3895,7 +3590,7 @@
           <a:bodyPr wrap="square" rtlCol="0" anchor="ctr"/>
           <a:lstStyle/>
           <a:p>
-            <a:pPr indent="0" marL="0">
+            <a:pPr marL="0" indent="0">
               <a:buNone/>
             </a:pPr>
             <a:r>
@@ -3934,7 +3629,7 @@
           <a:bodyPr wrap="square" rtlCol="0" anchor="ctr"/>
           <a:lstStyle/>
           <a:p>
-            <a:pPr algn="r" indent="0" marL="0">
+            <a:pPr marL="0" indent="0" algn="r">
               <a:buNone/>
             </a:pPr>
             <a:r>
@@ -3973,7 +3668,7 @@
           <a:bodyPr wrap="square" rtlCol="0" anchor="t"/>
           <a:lstStyle/>
           <a:p>
-            <a:pPr indent="0" marL="0">
+            <a:pPr marL="0" indent="0">
               <a:buNone/>
             </a:pPr>
             <a:r>
@@ -3993,14 +3688,14 @@
       </p:sp>
       <p:pic>
         <p:nvPicPr>
-          <p:cNvPr id="6" name="Image 0" descr="C:/Users/Aitor/docxgen/img/psp-t2-basic-credenciales-incorrectas.png">    </p:cNvPr>
+          <p:cNvPr id="6" name="Image 0" descr="C:/Users/Aitor/docxgen/img/psp-t2-basic-credenciales-incorrectas.png"/>
           <p:cNvPicPr>
             <a:picLocks noChangeAspect="1"/>
           </p:cNvPicPr>
           <p:nvPr/>
         </p:nvPicPr>
         <p:blipFill>
-          <a:blip r:embed="rId1"/>
+          <a:blip r:embed="rId3"/>
           <a:stretch>
             <a:fillRect/>
           </a:stretch>
@@ -4064,6 +3759,13 @@
             <a:prstDash val="solid"/>
           </a:ln>
         </p:spPr>
+        <p:txBody>
+          <a:bodyPr/>
+          <a:lstStyle/>
+          <a:p>
+            <a:endParaRPr lang="es-ES"/>
+          </a:p>
+        </p:txBody>
       </p:sp>
       <p:sp>
         <p:nvSpPr>
@@ -4086,7 +3788,7 @@
           <a:bodyPr wrap="square" rtlCol="0" anchor="ctr"/>
           <a:lstStyle/>
           <a:p>
-            <a:pPr indent="0" marL="0">
+            <a:pPr marL="0" indent="0">
               <a:buNone/>
             </a:pPr>
             <a:r>
@@ -4125,7 +3827,7 @@
           <a:bodyPr wrap="square" rtlCol="0" anchor="ctr"/>
           <a:lstStyle/>
           <a:p>
-            <a:pPr algn="r" indent="0" marL="0">
+            <a:pPr marL="0" indent="0" algn="r">
               <a:buNone/>
             </a:pPr>
             <a:r>
@@ -4164,7 +3866,7 @@
           <a:bodyPr wrap="square" rtlCol="0" anchor="t"/>
           <a:lstStyle/>
           <a:p>
-            <a:pPr indent="0" marL="0">
+            <a:pPr marL="0" indent="0">
               <a:buNone/>
             </a:pPr>
             <a:r>
@@ -4206,6 +3908,13 @@
             <a:prstDash val="solid"/>
           </a:ln>
         </p:spPr>
+        <p:txBody>
+          <a:bodyPr/>
+          <a:lstStyle/>
+          <a:p>
+            <a:endParaRPr lang="es-ES"/>
+          </a:p>
+        </p:txBody>
       </p:sp>
       <p:sp>
         <p:nvSpPr>
@@ -4228,7 +3937,7 @@
           <a:bodyPr wrap="square" rtlCol="0" anchor="t"/>
           <a:lstStyle/>
           <a:p>
-            <a:pPr indent="0" marL="0">
+            <a:pPr marL="0" indent="0">
               <a:buNone/>
             </a:pPr>
             <a:r>
@@ -4246,7 +3955,7 @@
             <a:endParaRPr lang="en-US" sz="1800" dirty="0"/>
           </a:p>
           <a:p>
-            <a:pPr indent="0" marL="0">
+            <a:pPr marL="0" indent="0">
               <a:buNone/>
             </a:pPr>
             <a:r>
@@ -4313,6 +4022,13 @@
             <a:prstDash val="solid"/>
           </a:ln>
         </p:spPr>
+        <p:txBody>
+          <a:bodyPr/>
+          <a:lstStyle/>
+          <a:p>
+            <a:endParaRPr lang="es-ES"/>
+          </a:p>
+        </p:txBody>
       </p:sp>
       <p:sp>
         <p:nvSpPr>
@@ -4335,7 +4051,7 @@
           <a:bodyPr wrap="square" rtlCol="0" anchor="ctr"/>
           <a:lstStyle/>
           <a:p>
-            <a:pPr indent="0" marL="0">
+            <a:pPr marL="0" indent="0">
               <a:buNone/>
             </a:pPr>
             <a:r>
@@ -4374,7 +4090,7 @@
           <a:bodyPr wrap="square" rtlCol="0" anchor="ctr"/>
           <a:lstStyle/>
           <a:p>
-            <a:pPr algn="r" indent="0" marL="0">
+            <a:pPr marL="0" indent="0" algn="r">
               <a:buNone/>
             </a:pPr>
             <a:r>
@@ -4408,16 +4124,34 @@
         </p:nvGraphicFramePr>
         <p:xfrm>
           <a:off x="548640" y="1554480"/>
-          <a:ext cx="11091672" cy="914400"/>
+          <a:ext cx="11091672" cy="2743200"/>
         </p:xfrm>
         <a:graphic>
           <a:graphicData uri="http://schemas.openxmlformats.org/drawingml/2006/table">
             <a:tbl>
               <a:tblPr/>
               <a:tblGrid>
-                <a:gridCol w="1996501"/>
-                <a:gridCol w="3105668"/>
-                <a:gridCol w="5989503"/>
+                <a:gridCol w="1996501">
+                  <a:extLst>
+                    <a:ext uri="{9D8B030D-6E8A-4147-A177-3AD203B41FA5}">
+                      <a16:colId xmlns:a16="http://schemas.microsoft.com/office/drawing/2014/main" val="20000"/>
+                    </a:ext>
+                  </a:extLst>
+                </a:gridCol>
+                <a:gridCol w="3105668">
+                  <a:extLst>
+                    <a:ext uri="{9D8B030D-6E8A-4147-A177-3AD203B41FA5}">
+                      <a16:colId xmlns:a16="http://schemas.microsoft.com/office/drawing/2014/main" val="20001"/>
+                    </a:ext>
+                  </a:extLst>
+                </a:gridCol>
+                <a:gridCol w="5989503">
+                  <a:extLst>
+                    <a:ext uri="{9D8B030D-6E8A-4147-A177-3AD203B41FA5}">
+                      <a16:colId xmlns:a16="http://schemas.microsoft.com/office/drawing/2014/main" val="20002"/>
+                    </a:ext>
+                  </a:extLst>
+                </a:gridCol>
               </a:tblGrid>
               <a:tr h="914400">
                 <a:tc>
@@ -4425,7 +4159,7 @@
                     <a:bodyPr/>
                     <a:lstStyle/>
                     <a:p>
-                      <a:pPr algn="ctr" indent="0" marL="0">
+                      <a:pPr marL="0" indent="0" algn="ctr">
                         <a:buNone/>
                       </a:pPr>
                       <a:endParaRPr lang="en-US" sz="1700" dirty="0">
@@ -4435,7 +4169,7 @@
                       </a:endParaRPr>
                     </a:p>
                   </a:txBody>
-                  <a:tcPr marL="91440" marR="91440" marT="45720" marB="45720" anchor="ctr">
+                  <a:tcPr anchor="ctr">
                     <a:lnL w="12700" cap="flat" cmpd="sng" algn="ctr">
                       <a:solidFill>
                         <a:srgbClr val="EEEEEE"/>
@@ -4482,7 +4216,7 @@
                     <a:bodyPr/>
                     <a:lstStyle/>
                     <a:p>
-                      <a:pPr algn="ctr" indent="0" marL="0">
+                      <a:pPr marL="0" indent="0" algn="ctr">
                         <a:buNone/>
                       </a:pPr>
                       <a:r>
@@ -4503,7 +4237,7 @@
                       </a:endParaRPr>
                     </a:p>
                   </a:txBody>
-                  <a:tcPr marL="91440" marR="91440" marT="45720" marB="45720" anchor="ctr">
+                  <a:tcPr anchor="ctr">
                     <a:lnL w="12700" cap="flat" cmpd="sng" algn="ctr">
                       <a:solidFill>
                         <a:srgbClr val="EEEEEE"/>
@@ -4550,7 +4284,7 @@
                     <a:bodyPr/>
                     <a:lstStyle/>
                     <a:p>
-                      <a:pPr algn="ctr" indent="0" marL="0">
+                      <a:pPr marL="0" indent="0" algn="ctr">
                         <a:buNone/>
                       </a:pPr>
                       <a:r>
@@ -4571,7 +4305,7 @@
                       </a:endParaRPr>
                     </a:p>
                   </a:txBody>
-                  <a:tcPr marL="91440" marR="91440" marT="45720" marB="45720" anchor="ctr">
+                  <a:tcPr anchor="ctr">
                     <a:lnL w="12700" cap="flat" cmpd="sng" algn="ctr">
                       <a:solidFill>
                         <a:srgbClr val="EEEEEE"/>
@@ -4613,6 +4347,11 @@
                     </a:solidFill>
                   </a:tcPr>
                 </a:tc>
+                <a:extLst>
+                  <a:ext uri="{0D108BD9-81ED-4DB2-BD59-A6C34878D82A}">
+                    <a16:rowId xmlns:a16="http://schemas.microsoft.com/office/drawing/2014/main" val="10000"/>
+                  </a:ext>
+                </a:extLst>
               </a:tr>
               <a:tr h="914400">
                 <a:tc>
@@ -4620,7 +4359,7 @@
                     <a:bodyPr/>
                     <a:lstStyle/>
                     <a:p>
-                      <a:pPr indent="0" marL="0">
+                      <a:pPr marL="0" indent="0">
                         <a:buNone/>
                       </a:pPr>
                       <a:r>
@@ -4641,7 +4380,7 @@
                       </a:endParaRPr>
                     </a:p>
                   </a:txBody>
-                  <a:tcPr marL="91440" marR="91440" marT="45720" marB="45720" anchor="ctr">
+                  <a:tcPr anchor="ctr">
                     <a:lnL w="12700" cap="flat" cmpd="sng" algn="ctr">
                       <a:solidFill>
                         <a:srgbClr val="EEEEEE"/>
@@ -4688,7 +4427,7 @@
                     <a:bodyPr/>
                     <a:lstStyle/>
                     <a:p>
-                      <a:pPr indent="0" marL="0">
+                      <a:pPr marL="0" indent="0">
                         <a:buNone/>
                       </a:pPr>
                       <a:r>
@@ -4709,7 +4448,7 @@
                       </a:endParaRPr>
                     </a:p>
                   </a:txBody>
-                  <a:tcPr marL="91440" marR="91440" marT="45720" marB="45720" anchor="ctr">
+                  <a:tcPr anchor="ctr">
                     <a:lnL w="12700" cap="flat" cmpd="sng" algn="ctr">
                       <a:solidFill>
                         <a:srgbClr val="EEEEEE"/>
@@ -4756,7 +4495,7 @@
                     <a:bodyPr/>
                     <a:lstStyle/>
                     <a:p>
-                      <a:pPr indent="0" marL="0">
+                      <a:pPr marL="0" indent="0">
                         <a:buNone/>
                       </a:pPr>
                       <a:r>
@@ -4777,7 +4516,7 @@
                       </a:endParaRPr>
                     </a:p>
                   </a:txBody>
-                  <a:tcPr marL="91440" marR="91440" marT="45720" marB="45720" anchor="ctr">
+                  <a:tcPr anchor="ctr">
                     <a:lnL w="12700" cap="flat" cmpd="sng" algn="ctr">
                       <a:solidFill>
                         <a:srgbClr val="EEEEEE"/>
@@ -4819,6 +4558,11 @@
                     </a:solidFill>
                   </a:tcPr>
                 </a:tc>
+                <a:extLst>
+                  <a:ext uri="{0D108BD9-81ED-4DB2-BD59-A6C34878D82A}">
+                    <a16:rowId xmlns:a16="http://schemas.microsoft.com/office/drawing/2014/main" val="10001"/>
+                  </a:ext>
+                </a:extLst>
               </a:tr>
               <a:tr h="914400">
                 <a:tc>
@@ -4826,7 +4570,7 @@
                     <a:bodyPr/>
                     <a:lstStyle/>
                     <a:p>
-                      <a:pPr indent="0" marL="0">
+                      <a:pPr marL="0" indent="0">
                         <a:buNone/>
                       </a:pPr>
                       <a:r>
@@ -4847,7 +4591,7 @@
                       </a:endParaRPr>
                     </a:p>
                   </a:txBody>
-                  <a:tcPr marL="91440" marR="91440" marT="45720" marB="45720" anchor="ctr">
+                  <a:tcPr anchor="ctr">
                     <a:lnL w="12700" cap="flat" cmpd="sng" algn="ctr">
                       <a:solidFill>
                         <a:srgbClr val="EEEEEE"/>
@@ -4894,7 +4638,7 @@
                     <a:bodyPr/>
                     <a:lstStyle/>
                     <a:p>
-                      <a:pPr indent="0" marL="0">
+                      <a:pPr marL="0" indent="0">
                         <a:buNone/>
                       </a:pPr>
                       <a:r>
@@ -4915,7 +4659,7 @@
                       </a:endParaRPr>
                     </a:p>
                   </a:txBody>
-                  <a:tcPr marL="91440" marR="91440" marT="45720" marB="45720" anchor="ctr">
+                  <a:tcPr anchor="ctr">
                     <a:lnL w="12700" cap="flat" cmpd="sng" algn="ctr">
                       <a:solidFill>
                         <a:srgbClr val="EEEEEE"/>
@@ -4962,7 +4706,7 @@
                     <a:bodyPr/>
                     <a:lstStyle/>
                     <a:p>
-                      <a:pPr indent="0" marL="0">
+                      <a:pPr marL="0" indent="0">
                         <a:buNone/>
                       </a:pPr>
                       <a:r>
@@ -4983,7 +4727,7 @@
                       </a:endParaRPr>
                     </a:p>
                   </a:txBody>
-                  <a:tcPr marL="91440" marR="91440" marT="45720" marB="45720" anchor="ctr">
+                  <a:tcPr anchor="ctr">
                     <a:lnL w="12700" cap="flat" cmpd="sng" algn="ctr">
                       <a:solidFill>
                         <a:srgbClr val="EEEEEE"/>
@@ -5025,6 +4769,11 @@
                     </a:solidFill>
                   </a:tcPr>
                 </a:tc>
+                <a:extLst>
+                  <a:ext uri="{0D108BD9-81ED-4DB2-BD59-A6C34878D82A}">
+                    <a16:rowId xmlns:a16="http://schemas.microsoft.com/office/drawing/2014/main" val="10002"/>
+                  </a:ext>
+                </a:extLst>
               </a:tr>
             </a:tbl>
           </a:graphicData>
@@ -5051,7 +4800,7 @@
           <a:bodyPr wrap="square" rtlCol="0" anchor="t"/>
           <a:lstStyle/>
           <a:p>
-            <a:pPr indent="0" marL="0">
+            <a:pPr marL="0" indent="0">
               <a:buNone/>
             </a:pPr>
             <a:r>
@@ -5118,6 +4867,13 @@
             <a:prstDash val="solid"/>
           </a:ln>
         </p:spPr>
+        <p:txBody>
+          <a:bodyPr/>
+          <a:lstStyle/>
+          <a:p>
+            <a:endParaRPr lang="es-ES"/>
+          </a:p>
+        </p:txBody>
       </p:sp>
       <p:sp>
         <p:nvSpPr>
@@ -5140,7 +4896,7 @@
           <a:bodyPr wrap="square" rtlCol="0" anchor="ctr"/>
           <a:lstStyle/>
           <a:p>
-            <a:pPr indent="0" marL="0">
+            <a:pPr marL="0" indent="0">
               <a:buNone/>
             </a:pPr>
             <a:r>
@@ -5179,7 +4935,7 @@
           <a:bodyPr wrap="square" rtlCol="0" anchor="ctr"/>
           <a:lstStyle/>
           <a:p>
-            <a:pPr algn="r" indent="0" marL="0">
+            <a:pPr marL="0" indent="0" algn="r">
               <a:buNone/>
             </a:pPr>
             <a:r>
@@ -5221,6 +4977,13 @@
             <a:prstDash val="solid"/>
           </a:ln>
         </p:spPr>
+        <p:txBody>
+          <a:bodyPr/>
+          <a:lstStyle/>
+          <a:p>
+            <a:endParaRPr lang="es-ES"/>
+          </a:p>
+        </p:txBody>
       </p:sp>
       <p:sp>
         <p:nvSpPr>
@@ -5243,7 +5006,7 @@
           <a:bodyPr wrap="square" rtlCol="0" anchor="ctr"/>
           <a:lstStyle/>
           <a:p>
-            <a:pPr indent="0" marL="0">
+            <a:pPr marL="0" indent="0">
               <a:buNone/>
             </a:pPr>
             <a:r>
@@ -5282,7 +5045,7 @@
           <a:bodyPr wrap="square" rtlCol="0" anchor="t"/>
           <a:lstStyle/>
           <a:p>
-            <a:pPr indent="0" marL="0">
+            <a:pPr marL="0" indent="0">
               <a:buNone/>
             </a:pPr>
             <a:r>
@@ -5349,6 +5112,13 @@
             <a:prstDash val="solid"/>
           </a:ln>
         </p:spPr>
+        <p:txBody>
+          <a:bodyPr/>
+          <a:lstStyle/>
+          <a:p>
+            <a:endParaRPr lang="es-ES"/>
+          </a:p>
+        </p:txBody>
       </p:sp>
       <p:sp>
         <p:nvSpPr>
@@ -5371,7 +5141,7 @@
           <a:bodyPr wrap="square" rtlCol="0" anchor="ctr"/>
           <a:lstStyle/>
           <a:p>
-            <a:pPr indent="0" marL="0">
+            <a:pPr marL="0" indent="0">
               <a:buNone/>
             </a:pPr>
             <a:r>
@@ -5410,7 +5180,7 @@
           <a:bodyPr wrap="square" rtlCol="0" anchor="ctr"/>
           <a:lstStyle/>
           <a:p>
-            <a:pPr algn="r" indent="0" marL="0">
+            <a:pPr marL="0" indent="0" algn="r">
               <a:buNone/>
             </a:pPr>
             <a:r>
@@ -5449,7 +5219,7 @@
           <a:bodyPr wrap="square" rtlCol="0" anchor="t"/>
           <a:lstStyle/>
           <a:p>
-            <a:pPr indent="0" marL="0">
+            <a:pPr marL="0" indent="0">
               <a:buNone/>
             </a:pPr>
             <a:r>
@@ -5491,6 +5261,13 @@
             <a:prstDash val="solid"/>
           </a:ln>
         </p:spPr>
+        <p:txBody>
+          <a:bodyPr/>
+          <a:lstStyle/>
+          <a:p>
+            <a:endParaRPr lang="es-ES"/>
+          </a:p>
+        </p:txBody>
       </p:sp>
       <p:sp>
         <p:nvSpPr>
@@ -5516,6 +5293,13 @@
             <a:prstDash val="solid"/>
           </a:ln>
         </p:spPr>
+        <p:txBody>
+          <a:bodyPr/>
+          <a:lstStyle/>
+          <a:p>
+            <a:endParaRPr lang="es-ES"/>
+          </a:p>
+        </p:txBody>
       </p:sp>
       <p:sp>
         <p:nvSpPr>
@@ -5538,7 +5322,7 @@
           <a:bodyPr wrap="square" rtlCol="0" anchor="t"/>
           <a:lstStyle/>
           <a:p>
-            <a:pPr indent="0" marL="0">
+            <a:pPr marL="0" indent="0">
               <a:buNone/>
             </a:pPr>
             <a:r>
@@ -5580,6 +5364,13 @@
             <a:prstDash val="solid"/>
           </a:ln>
         </p:spPr>
+        <p:txBody>
+          <a:bodyPr/>
+          <a:lstStyle/>
+          <a:p>
+            <a:endParaRPr lang="es-ES"/>
+          </a:p>
+        </p:txBody>
       </p:sp>
       <p:sp>
         <p:nvSpPr>
@@ -5605,6 +5396,13 @@
             <a:prstDash val="solid"/>
           </a:ln>
         </p:spPr>
+        <p:txBody>
+          <a:bodyPr/>
+          <a:lstStyle/>
+          <a:p>
+            <a:endParaRPr lang="es-ES"/>
+          </a:p>
+        </p:txBody>
       </p:sp>
       <p:sp>
         <p:nvSpPr>
@@ -5627,7 +5425,7 @@
           <a:bodyPr wrap="square" rtlCol="0" anchor="t"/>
           <a:lstStyle/>
           <a:p>
-            <a:pPr indent="0" marL="0">
+            <a:pPr marL="0" indent="0">
               <a:buNone/>
             </a:pPr>
             <a:r>
@@ -5694,6 +5492,13 @@
             <a:prstDash val="solid"/>
           </a:ln>
         </p:spPr>
+        <p:txBody>
+          <a:bodyPr/>
+          <a:lstStyle/>
+          <a:p>
+            <a:endParaRPr lang="es-ES"/>
+          </a:p>
+        </p:txBody>
       </p:sp>
       <p:sp>
         <p:nvSpPr>
@@ -5716,7 +5521,7 @@
           <a:bodyPr wrap="square" rtlCol="0" anchor="ctr"/>
           <a:lstStyle/>
           <a:p>
-            <a:pPr indent="0" marL="0">
+            <a:pPr marL="0" indent="0">
               <a:buNone/>
             </a:pPr>
             <a:r>
@@ -5755,7 +5560,7 @@
           <a:bodyPr wrap="square" rtlCol="0" anchor="ctr"/>
           <a:lstStyle/>
           <a:p>
-            <a:pPr algn="r" indent="0" marL="0">
+            <a:pPr marL="0" indent="0" algn="r">
               <a:buNone/>
             </a:pPr>
             <a:r>
@@ -5781,8 +5586,8 @@
         </p:nvSpPr>
         <p:spPr>
           <a:xfrm>
-            <a:off x="548640" y="1920240"/>
-            <a:ext cx="11091672" cy="1920240"/>
+            <a:off x="548640" y="1920239"/>
+            <a:ext cx="11091672" cy="2119915"/>
           </a:xfrm>
           <a:prstGeom prst="roundRect">
             <a:avLst/>
@@ -5797,6 +5602,13 @@
             <a:prstDash val="solid"/>
           </a:ln>
         </p:spPr>
+        <p:txBody>
+          <a:bodyPr/>
+          <a:lstStyle/>
+          <a:p>
+            <a:endParaRPr lang="es-ES"/>
+          </a:p>
+        </p:txBody>
       </p:sp>
       <p:sp>
         <p:nvSpPr>
@@ -5819,7 +5631,7 @@
           <a:bodyPr wrap="square" rtlCol="0" anchor="t"/>
           <a:lstStyle/>
           <a:p>
-            <a:pPr indent="0" marL="0">
+            <a:pPr marL="0" indent="0">
               <a:buNone/>
             </a:pPr>
             <a:r>
@@ -5837,7 +5649,7 @@
             <a:endParaRPr lang="en-US" sz="2000" dirty="0"/>
           </a:p>
           <a:p>
-            <a:pPr indent="0" marL="0">
+            <a:pPr marL="0" indent="0">
               <a:buNone/>
             </a:pPr>
             <a:r>
@@ -5904,6 +5716,13 @@
             <a:prstDash val="solid"/>
           </a:ln>
         </p:spPr>
+        <p:txBody>
+          <a:bodyPr/>
+          <a:lstStyle/>
+          <a:p>
+            <a:endParaRPr lang="es-ES"/>
+          </a:p>
+        </p:txBody>
       </p:sp>
       <p:sp>
         <p:nvSpPr>
@@ -5926,7 +5745,7 @@
           <a:bodyPr wrap="square" rtlCol="0" anchor="ctr"/>
           <a:lstStyle/>
           <a:p>
-            <a:pPr indent="0" marL="0">
+            <a:pPr marL="0" indent="0">
               <a:buNone/>
             </a:pPr>
             <a:r>
@@ -5965,7 +5784,7 @@
           <a:bodyPr wrap="square" rtlCol="0" anchor="ctr"/>
           <a:lstStyle/>
           <a:p>
-            <a:pPr algn="r" indent="0" marL="0">
+            <a:pPr marL="0" indent="0" algn="r">
               <a:buNone/>
             </a:pPr>
             <a:r>
@@ -6004,7 +5823,7 @@
           <a:bodyPr wrap="square" rtlCol="0" anchor="t"/>
           <a:lstStyle/>
           <a:p>
-            <a:pPr indent="0" marL="0">
+            <a:pPr marL="0" indent="0">
               <a:buNone/>
             </a:pPr>
             <a:r>
@@ -6046,6 +5865,13 @@
             <a:prstDash val="solid"/>
           </a:ln>
         </p:spPr>
+        <p:txBody>
+          <a:bodyPr/>
+          <a:lstStyle/>
+          <a:p>
+            <a:endParaRPr lang="es-ES"/>
+          </a:p>
+        </p:txBody>
       </p:sp>
       <p:sp>
         <p:nvSpPr>
@@ -6071,6 +5897,13 @@
             <a:prstDash val="solid"/>
           </a:ln>
         </p:spPr>
+        <p:txBody>
+          <a:bodyPr/>
+          <a:lstStyle/>
+          <a:p>
+            <a:endParaRPr lang="es-ES"/>
+          </a:p>
+        </p:txBody>
       </p:sp>
       <p:sp>
         <p:nvSpPr>
@@ -6093,7 +5926,7 @@
           <a:bodyPr wrap="square" rtlCol="0" anchor="t"/>
           <a:lstStyle/>
           <a:p>
-            <a:pPr indent="0" marL="0">
+            <a:pPr marL="0" indent="0">
               <a:buNone/>
             </a:pPr>
             <a:r>
@@ -6110,7 +5943,7 @@
             <a:endParaRPr lang="en-US" sz="1400" dirty="0"/>
           </a:p>
           <a:p>
-            <a:pPr indent="0" marL="0">
+            <a:pPr marL="0" indent="0">
               <a:buNone/>
             </a:pPr>
             <a:r>
@@ -6127,7 +5960,7 @@
             <a:endParaRPr lang="en-US" sz="1400" dirty="0"/>
           </a:p>
           <a:p>
-            <a:pPr indent="0" marL="0">
+            <a:pPr marL="0" indent="0">
               <a:buNone/>
             </a:pPr>
             <a:r>
@@ -6144,7 +5977,7 @@
             <a:endParaRPr lang="en-US" sz="1400" dirty="0"/>
           </a:p>
           <a:p>
-            <a:pPr indent="0" marL="0">
+            <a:pPr marL="0" indent="0">
               <a:buNone/>
             </a:pPr>
             <a:r>
@@ -6161,13 +5994,13 @@
             <a:endParaRPr lang="en-US" sz="1400" dirty="0"/>
           </a:p>
           <a:p>
-            <a:pPr indent="0" marL="0">
+            <a:pPr marL="0" indent="0">
               <a:buNone/>
             </a:pPr>
             <a:endParaRPr lang="en-US" sz="1400" dirty="0"/>
           </a:p>
           <a:p>
-            <a:pPr indent="0" marL="0">
+            <a:pPr marL="0" indent="0">
               <a:buNone/>
             </a:pPr>
             <a:r>
@@ -6184,7 +6017,7 @@
             <a:endParaRPr lang="en-US" sz="1400" dirty="0"/>
           </a:p>
           <a:p>
-            <a:pPr indent="0" marL="0">
+            <a:pPr marL="0" indent="0">
               <a:buNone/>
             </a:pPr>
             <a:r>
@@ -6201,13 +6034,13 @@
             <a:endParaRPr lang="en-US" sz="1400" dirty="0"/>
           </a:p>
           <a:p>
-            <a:pPr indent="0" marL="0">
+            <a:pPr marL="0" indent="0">
               <a:buNone/>
             </a:pPr>
             <a:endParaRPr lang="en-US" sz="1400" dirty="0"/>
           </a:p>
           <a:p>
-            <a:pPr indent="0" marL="0">
+            <a:pPr marL="0" indent="0">
               <a:buNone/>
             </a:pPr>
             <a:r>
@@ -6224,7 +6057,7 @@
             <a:endParaRPr lang="en-US" sz="1400" dirty="0"/>
           </a:p>
           <a:p>
-            <a:pPr indent="0" marL="0">
+            <a:pPr marL="0" indent="0">
               <a:buNone/>
             </a:pPr>
             <a:r>
@@ -6291,6 +6124,13 @@
             <a:prstDash val="solid"/>
           </a:ln>
         </p:spPr>
+        <p:txBody>
+          <a:bodyPr/>
+          <a:lstStyle/>
+          <a:p>
+            <a:endParaRPr lang="es-ES"/>
+          </a:p>
+        </p:txBody>
       </p:sp>
       <p:sp>
         <p:nvSpPr>
@@ -6313,7 +6153,7 @@
           <a:bodyPr wrap="square" rtlCol="0" anchor="ctr"/>
           <a:lstStyle/>
           <a:p>
-            <a:pPr indent="0" marL="0">
+            <a:pPr marL="0" indent="0">
               <a:buNone/>
             </a:pPr>
             <a:r>
@@ -6352,7 +6192,7 @@
           <a:bodyPr wrap="square" rtlCol="0" anchor="ctr"/>
           <a:lstStyle/>
           <a:p>
-            <a:pPr algn="r" indent="0" marL="0">
+            <a:pPr marL="0" indent="0" algn="r">
               <a:buNone/>
             </a:pPr>
             <a:r>
@@ -6394,6 +6234,13 @@
             <a:prstDash val="solid"/>
           </a:ln>
         </p:spPr>
+        <p:txBody>
+          <a:bodyPr/>
+          <a:lstStyle/>
+          <a:p>
+            <a:endParaRPr lang="es-ES"/>
+          </a:p>
+        </p:txBody>
       </p:sp>
       <p:sp>
         <p:nvSpPr>
@@ -6416,7 +6263,7 @@
           <a:bodyPr wrap="square" rtlCol="0" anchor="ctr"/>
           <a:lstStyle/>
           <a:p>
-            <a:pPr indent="0" marL="0">
+            <a:pPr marL="0" indent="0">
               <a:buNone/>
             </a:pPr>
             <a:r>
@@ -6458,6 +6305,13 @@
             <a:prstDash val="solid"/>
           </a:ln>
         </p:spPr>
+        <p:txBody>
+          <a:bodyPr/>
+          <a:lstStyle/>
+          <a:p>
+            <a:endParaRPr lang="es-ES"/>
+          </a:p>
+        </p:txBody>
       </p:sp>
       <p:sp>
         <p:nvSpPr>
@@ -6480,7 +6334,7 @@
           <a:bodyPr wrap="square" rtlCol="0" anchor="t"/>
           <a:lstStyle/>
           <a:p>
-            <a:pPr indent="0" marL="0">
+            <a:pPr marL="0" indent="0">
               <a:buNone/>
             </a:pPr>
             <a:r>
@@ -6498,7 +6352,7 @@
             <a:endParaRPr lang="en-US" sz="1850" dirty="0"/>
           </a:p>
           <a:p>
-            <a:pPr indent="0" marL="0">
+            <a:pPr marL="0" indent="0">
               <a:buNone/>
             </a:pPr>
             <a:r>
@@ -6565,6 +6419,13 @@
             <a:prstDash val="solid"/>
           </a:ln>
         </p:spPr>
+        <p:txBody>
+          <a:bodyPr/>
+          <a:lstStyle/>
+          <a:p>
+            <a:endParaRPr lang="es-ES"/>
+          </a:p>
+        </p:txBody>
       </p:sp>
       <p:sp>
         <p:nvSpPr>
@@ -6587,7 +6448,7 @@
           <a:bodyPr wrap="square" rtlCol="0" anchor="ctr"/>
           <a:lstStyle/>
           <a:p>
-            <a:pPr indent="0" marL="0">
+            <a:pPr marL="0" indent="0">
               <a:buNone/>
             </a:pPr>
             <a:r>
@@ -6626,7 +6487,7 @@
           <a:bodyPr wrap="square" rtlCol="0" anchor="ctr"/>
           <a:lstStyle/>
           <a:p>
-            <a:pPr algn="r" indent="0" marL="0">
+            <a:pPr marL="0" indent="0" algn="r">
               <a:buNone/>
             </a:pPr>
             <a:r>
@@ -6668,6 +6529,13 @@
             <a:prstDash val="solid"/>
           </a:ln>
         </p:spPr>
+        <p:txBody>
+          <a:bodyPr/>
+          <a:lstStyle/>
+          <a:p>
+            <a:endParaRPr lang="es-ES"/>
+          </a:p>
+        </p:txBody>
       </p:sp>
       <p:sp>
         <p:nvSpPr>
@@ -6693,6 +6561,13 @@
             <a:prstDash val="solid"/>
           </a:ln>
         </p:spPr>
+        <p:txBody>
+          <a:bodyPr/>
+          <a:lstStyle/>
+          <a:p>
+            <a:endParaRPr lang="es-ES"/>
+          </a:p>
+        </p:txBody>
       </p:sp>
       <p:sp>
         <p:nvSpPr>
@@ -6715,7 +6590,7 @@
           <a:bodyPr wrap="square" rtlCol="0" anchor="t"/>
           <a:lstStyle/>
           <a:p>
-            <a:pPr indent="0" marL="0">
+            <a:pPr marL="0" indent="0">
               <a:buNone/>
             </a:pPr>
             <a:r>
@@ -6732,7 +6607,7 @@
             <a:endParaRPr lang="en-US" sz="1600" dirty="0"/>
           </a:p>
           <a:p>
-            <a:pPr indent="0" marL="0">
+            <a:pPr marL="0" indent="0">
               <a:buNone/>
             </a:pPr>
             <a:r>
@@ -6749,7 +6624,7 @@
             <a:endParaRPr lang="en-US" sz="1600" dirty="0"/>
           </a:p>
           <a:p>
-            <a:pPr indent="0" marL="0">
+            <a:pPr marL="0" indent="0">
               <a:buNone/>
             </a:pPr>
             <a:r>
@@ -6766,7 +6641,7 @@
             <a:endParaRPr lang="en-US" sz="1600" dirty="0"/>
           </a:p>
           <a:p>
-            <a:pPr indent="0" marL="0">
+            <a:pPr marL="0" indent="0">
               <a:buNone/>
             </a:pPr>
             <a:r>
@@ -6783,7 +6658,7 @@
             <a:endParaRPr lang="en-US" sz="1600" dirty="0"/>
           </a:p>
           <a:p>
-            <a:pPr indent="0" marL="0">
+            <a:pPr marL="0" indent="0">
               <a:buNone/>
             </a:pPr>
             <a:r>
@@ -6800,7 +6675,7 @@
             <a:endParaRPr lang="en-US" sz="1600" dirty="0"/>
           </a:p>
           <a:p>
-            <a:pPr indent="0" marL="0">
+            <a:pPr marL="0" indent="0">
               <a:buNone/>
             </a:pPr>
             <a:r>
@@ -6817,7 +6692,7 @@
             <a:endParaRPr lang="en-US" sz="1600" dirty="0"/>
           </a:p>
           <a:p>
-            <a:pPr indent="0" marL="0">
+            <a:pPr marL="0" indent="0">
               <a:buNone/>
             </a:pPr>
             <a:r>
@@ -6834,7 +6709,7 @@
             <a:endParaRPr lang="en-US" sz="1600" dirty="0"/>
           </a:p>
           <a:p>
-            <a:pPr indent="0" marL="0">
+            <a:pPr marL="0" indent="0">
               <a:buNone/>
             </a:pPr>
             <a:r>
@@ -6851,7 +6726,7 @@
             <a:endParaRPr lang="en-US" sz="1600" dirty="0"/>
           </a:p>
           <a:p>
-            <a:pPr indent="0" marL="0">
+            <a:pPr marL="0" indent="0">
               <a:buNone/>
             </a:pPr>
             <a:r>
@@ -6868,7 +6743,7 @@
             <a:endParaRPr lang="en-US" sz="1600" dirty="0"/>
           </a:p>
           <a:p>
-            <a:pPr indent="0" marL="0">
+            <a:pPr marL="0" indent="0">
               <a:buNone/>
             </a:pPr>
             <a:r>
@@ -6885,7 +6760,7 @@
             <a:endParaRPr lang="en-US" sz="1600" dirty="0"/>
           </a:p>
           <a:p>
-            <a:pPr indent="0" marL="0">
+            <a:pPr marL="0" indent="0">
               <a:buNone/>
             </a:pPr>
             <a:r>
@@ -6952,6 +6827,13 @@
             <a:prstDash val="solid"/>
           </a:ln>
         </p:spPr>
+        <p:txBody>
+          <a:bodyPr/>
+          <a:lstStyle/>
+          <a:p>
+            <a:endParaRPr lang="es-ES"/>
+          </a:p>
+        </p:txBody>
       </p:sp>
       <p:sp>
         <p:nvSpPr>
@@ -6974,7 +6856,7 @@
           <a:bodyPr wrap="square" rtlCol="0" anchor="ctr"/>
           <a:lstStyle/>
           <a:p>
-            <a:pPr indent="0" marL="0">
+            <a:pPr marL="0" indent="0">
               <a:buNone/>
             </a:pPr>
             <a:r>
@@ -7013,7 +6895,7 @@
           <a:bodyPr wrap="square" rtlCol="0" anchor="ctr"/>
           <a:lstStyle/>
           <a:p>
-            <a:pPr algn="r" indent="0" marL="0">
+            <a:pPr marL="0" indent="0" algn="r">
               <a:buNone/>
             </a:pPr>
             <a:r>
@@ -7055,6 +6937,13 @@
             <a:prstDash val="solid"/>
           </a:ln>
         </p:spPr>
+        <p:txBody>
+          <a:bodyPr/>
+          <a:lstStyle/>
+          <a:p>
+            <a:endParaRPr lang="es-ES"/>
+          </a:p>
+        </p:txBody>
       </p:sp>
       <p:sp>
         <p:nvSpPr>
@@ -7077,7 +6966,7 @@
           <a:bodyPr wrap="square" rtlCol="0" anchor="ctr"/>
           <a:lstStyle/>
           <a:p>
-            <a:pPr indent="0" marL="0">
+            <a:pPr marL="0" indent="0">
               <a:buNone/>
             </a:pPr>
             <a:r>
@@ -7116,7 +7005,7 @@
           <a:bodyPr wrap="square" rtlCol="0" anchor="t"/>
           <a:lstStyle/>
           <a:p>
-            <a:pPr indent="0" marL="0">
+            <a:pPr marL="0" indent="0">
               <a:buNone/>
             </a:pPr>
             <a:r>
@@ -7183,6 +7072,13 @@
             <a:prstDash val="solid"/>
           </a:ln>
         </p:spPr>
+        <p:txBody>
+          <a:bodyPr/>
+          <a:lstStyle/>
+          <a:p>
+            <a:endParaRPr lang="es-ES"/>
+          </a:p>
+        </p:txBody>
       </p:sp>
       <p:sp>
         <p:nvSpPr>
@@ -7205,7 +7101,7 @@
           <a:bodyPr wrap="square" rtlCol="0" anchor="ctr"/>
           <a:lstStyle/>
           <a:p>
-            <a:pPr indent="0" marL="0">
+            <a:pPr marL="0" indent="0">
               <a:buNone/>
             </a:pPr>
             <a:r>
@@ -7244,7 +7140,7 @@
           <a:bodyPr wrap="square" rtlCol="0" anchor="ctr"/>
           <a:lstStyle/>
           <a:p>
-            <a:pPr algn="r" indent="0" marL="0">
+            <a:pPr marL="0" indent="0" algn="r">
               <a:buNone/>
             </a:pPr>
             <a:r>
@@ -7278,15 +7174,27 @@
         </p:nvGraphicFramePr>
         <p:xfrm>
           <a:off x="548640" y="1371600"/>
-          <a:ext cx="11091672" cy="914400"/>
+          <a:ext cx="11091672" cy="3730752"/>
         </p:xfrm>
         <a:graphic>
           <a:graphicData uri="http://schemas.openxmlformats.org/drawingml/2006/table">
             <a:tbl>
               <a:tblPr/>
               <a:tblGrid>
-                <a:gridCol w="4658502"/>
-                <a:gridCol w="6433170"/>
+                <a:gridCol w="4658502">
+                  <a:extLst>
+                    <a:ext uri="{9D8B030D-6E8A-4147-A177-3AD203B41FA5}">
+                      <a16:colId xmlns:a16="http://schemas.microsoft.com/office/drawing/2014/main" val="20000"/>
+                    </a:ext>
+                  </a:extLst>
+                </a:gridCol>
+                <a:gridCol w="6433170">
+                  <a:extLst>
+                    <a:ext uri="{9D8B030D-6E8A-4147-A177-3AD203B41FA5}">
+                      <a16:colId xmlns:a16="http://schemas.microsoft.com/office/drawing/2014/main" val="20001"/>
+                    </a:ext>
+                  </a:extLst>
+                </a:gridCol>
               </a:tblGrid>
               <a:tr h="621792">
                 <a:tc>
@@ -7294,7 +7202,7 @@
                     <a:bodyPr/>
                     <a:lstStyle/>
                     <a:p>
-                      <a:pPr algn="ctr" indent="0" marL="0">
+                      <a:pPr marL="0" indent="0" algn="ctr">
                         <a:buNone/>
                       </a:pPr>
                       <a:r>
@@ -7315,7 +7223,7 @@
                       </a:endParaRPr>
                     </a:p>
                   </a:txBody>
-                  <a:tcPr marL="91440" marR="91440" marT="45720" marB="45720" anchor="ctr">
+                  <a:tcPr anchor="ctr">
                     <a:lnL w="12700" cap="flat" cmpd="sng" algn="ctr">
                       <a:solidFill>
                         <a:srgbClr val="EEEEEE"/>
@@ -7362,7 +7270,7 @@
                     <a:bodyPr/>
                     <a:lstStyle/>
                     <a:p>
-                      <a:pPr algn="ctr" indent="0" marL="0">
+                      <a:pPr marL="0" indent="0" algn="ctr">
                         <a:buNone/>
                       </a:pPr>
                       <a:r>
@@ -7383,7 +7291,7 @@
                       </a:endParaRPr>
                     </a:p>
                   </a:txBody>
-                  <a:tcPr marL="91440" marR="91440" marT="45720" marB="45720" anchor="ctr">
+                  <a:tcPr anchor="ctr">
                     <a:lnL w="12700" cap="flat" cmpd="sng" algn="ctr">
                       <a:solidFill>
                         <a:srgbClr val="EEEEEE"/>
@@ -7425,6 +7333,11 @@
                     </a:solidFill>
                   </a:tcPr>
                 </a:tc>
+                <a:extLst>
+                  <a:ext uri="{0D108BD9-81ED-4DB2-BD59-A6C34878D82A}">
+                    <a16:rowId xmlns:a16="http://schemas.microsoft.com/office/drawing/2014/main" val="10000"/>
+                  </a:ext>
+                </a:extLst>
               </a:tr>
               <a:tr h="621792">
                 <a:tc>
@@ -7432,7 +7345,7 @@
                     <a:bodyPr/>
                     <a:lstStyle/>
                     <a:p>
-                      <a:pPr indent="0" marL="0">
+                      <a:pPr marL="0" indent="0">
                         <a:buNone/>
                       </a:pPr>
                       <a:r>
@@ -7453,7 +7366,7 @@
                       </a:endParaRPr>
                     </a:p>
                   </a:txBody>
-                  <a:tcPr marL="91440" marR="91440" marT="45720" marB="45720" anchor="ctr">
+                  <a:tcPr anchor="ctr">
                     <a:lnL w="12700" cap="flat" cmpd="sng" algn="ctr">
                       <a:solidFill>
                         <a:srgbClr val="EEEEEE"/>
@@ -7500,7 +7413,7 @@
                     <a:bodyPr/>
                     <a:lstStyle/>
                     <a:p>
-                      <a:pPr indent="0" marL="0">
+                      <a:pPr marL="0" indent="0">
                         <a:buNone/>
                       </a:pPr>
                       <a:r>
@@ -7521,7 +7434,7 @@
                       </a:endParaRPr>
                     </a:p>
                   </a:txBody>
-                  <a:tcPr marL="91440" marR="91440" marT="45720" marB="45720" anchor="ctr">
+                  <a:tcPr anchor="ctr">
                     <a:lnL w="12700" cap="flat" cmpd="sng" algn="ctr">
                       <a:solidFill>
                         <a:srgbClr val="EEEEEE"/>
@@ -7563,6 +7476,11 @@
                     </a:solidFill>
                   </a:tcPr>
                 </a:tc>
+                <a:extLst>
+                  <a:ext uri="{0D108BD9-81ED-4DB2-BD59-A6C34878D82A}">
+                    <a16:rowId xmlns:a16="http://schemas.microsoft.com/office/drawing/2014/main" val="10001"/>
+                  </a:ext>
+                </a:extLst>
               </a:tr>
               <a:tr h="621792">
                 <a:tc>
@@ -7570,7 +7488,7 @@
                     <a:bodyPr/>
                     <a:lstStyle/>
                     <a:p>
-                      <a:pPr indent="0" marL="0">
+                      <a:pPr marL="0" indent="0">
                         <a:buNone/>
                       </a:pPr>
                       <a:r>
@@ -7591,7 +7509,7 @@
                       </a:endParaRPr>
                     </a:p>
                   </a:txBody>
-                  <a:tcPr marL="91440" marR="91440" marT="45720" marB="45720" anchor="ctr">
+                  <a:tcPr anchor="ctr">
                     <a:lnL w="12700" cap="flat" cmpd="sng" algn="ctr">
                       <a:solidFill>
                         <a:srgbClr val="EEEEEE"/>
@@ -7638,7 +7556,7 @@
                     <a:bodyPr/>
                     <a:lstStyle/>
                     <a:p>
-                      <a:pPr indent="0" marL="0">
+                      <a:pPr marL="0" indent="0">
                         <a:buNone/>
                       </a:pPr>
                       <a:r>
@@ -7659,7 +7577,7 @@
                       </a:endParaRPr>
                     </a:p>
                   </a:txBody>
-                  <a:tcPr marL="91440" marR="91440" marT="45720" marB="45720" anchor="ctr">
+                  <a:tcPr anchor="ctr">
                     <a:lnL w="12700" cap="flat" cmpd="sng" algn="ctr">
                       <a:solidFill>
                         <a:srgbClr val="EEEEEE"/>
@@ -7701,6 +7619,11 @@
                     </a:solidFill>
                   </a:tcPr>
                 </a:tc>
+                <a:extLst>
+                  <a:ext uri="{0D108BD9-81ED-4DB2-BD59-A6C34878D82A}">
+                    <a16:rowId xmlns:a16="http://schemas.microsoft.com/office/drawing/2014/main" val="10002"/>
+                  </a:ext>
+                </a:extLst>
               </a:tr>
               <a:tr h="621792">
                 <a:tc>
@@ -7708,7 +7631,7 @@
                     <a:bodyPr/>
                     <a:lstStyle/>
                     <a:p>
-                      <a:pPr indent="0" marL="0">
+                      <a:pPr marL="0" indent="0">
                         <a:buNone/>
                       </a:pPr>
                       <a:r>
@@ -7729,7 +7652,7 @@
                       </a:endParaRPr>
                     </a:p>
                   </a:txBody>
-                  <a:tcPr marL="91440" marR="91440" marT="45720" marB="45720" anchor="ctr">
+                  <a:tcPr anchor="ctr">
                     <a:lnL w="12700" cap="flat" cmpd="sng" algn="ctr">
                       <a:solidFill>
                         <a:srgbClr val="EEEEEE"/>
@@ -7776,7 +7699,7 @@
                     <a:bodyPr/>
                     <a:lstStyle/>
                     <a:p>
-                      <a:pPr indent="0" marL="0">
+                      <a:pPr marL="0" indent="0">
                         <a:buNone/>
                       </a:pPr>
                       <a:r>
@@ -7797,7 +7720,7 @@
                       </a:endParaRPr>
                     </a:p>
                   </a:txBody>
-                  <a:tcPr marL="91440" marR="91440" marT="45720" marB="45720" anchor="ctr">
+                  <a:tcPr anchor="ctr">
                     <a:lnL w="12700" cap="flat" cmpd="sng" algn="ctr">
                       <a:solidFill>
                         <a:srgbClr val="EEEEEE"/>
@@ -7839,6 +7762,11 @@
                     </a:solidFill>
                   </a:tcPr>
                 </a:tc>
+                <a:extLst>
+                  <a:ext uri="{0D108BD9-81ED-4DB2-BD59-A6C34878D82A}">
+                    <a16:rowId xmlns:a16="http://schemas.microsoft.com/office/drawing/2014/main" val="10003"/>
+                  </a:ext>
+                </a:extLst>
               </a:tr>
               <a:tr h="621792">
                 <a:tc>
@@ -7846,7 +7774,7 @@
                     <a:bodyPr/>
                     <a:lstStyle/>
                     <a:p>
-                      <a:pPr indent="0" marL="0">
+                      <a:pPr marL="0" indent="0">
                         <a:buNone/>
                       </a:pPr>
                       <a:r>
@@ -7867,7 +7795,7 @@
                       </a:endParaRPr>
                     </a:p>
                   </a:txBody>
-                  <a:tcPr marL="91440" marR="91440" marT="45720" marB="45720" anchor="ctr">
+                  <a:tcPr anchor="ctr">
                     <a:lnL w="12700" cap="flat" cmpd="sng" algn="ctr">
                       <a:solidFill>
                         <a:srgbClr val="EEEEEE"/>
@@ -7914,7 +7842,7 @@
                     <a:bodyPr/>
                     <a:lstStyle/>
                     <a:p>
-                      <a:pPr indent="0" marL="0">
+                      <a:pPr marL="0" indent="0">
                         <a:buNone/>
                       </a:pPr>
                       <a:r>
@@ -7935,7 +7863,7 @@
                       </a:endParaRPr>
                     </a:p>
                   </a:txBody>
-                  <a:tcPr marL="91440" marR="91440" marT="45720" marB="45720" anchor="ctr">
+                  <a:tcPr anchor="ctr">
                     <a:lnL w="12700" cap="flat" cmpd="sng" algn="ctr">
                       <a:solidFill>
                         <a:srgbClr val="EEEEEE"/>
@@ -7977,6 +7905,11 @@
                     </a:solidFill>
                   </a:tcPr>
                 </a:tc>
+                <a:extLst>
+                  <a:ext uri="{0D108BD9-81ED-4DB2-BD59-A6C34878D82A}">
+                    <a16:rowId xmlns:a16="http://schemas.microsoft.com/office/drawing/2014/main" val="10004"/>
+                  </a:ext>
+                </a:extLst>
               </a:tr>
               <a:tr h="621792">
                 <a:tc>
@@ -7984,7 +7917,7 @@
                     <a:bodyPr/>
                     <a:lstStyle/>
                     <a:p>
-                      <a:pPr indent="0" marL="0">
+                      <a:pPr marL="0" indent="0">
                         <a:buNone/>
                       </a:pPr>
                       <a:r>
@@ -8005,7 +7938,7 @@
                       </a:endParaRPr>
                     </a:p>
                   </a:txBody>
-                  <a:tcPr marL="91440" marR="91440" marT="45720" marB="45720" anchor="ctr">
+                  <a:tcPr anchor="ctr">
                     <a:lnL w="12700" cap="flat" cmpd="sng" algn="ctr">
                       <a:solidFill>
                         <a:srgbClr val="EEEEEE"/>
@@ -8052,7 +7985,7 @@
                     <a:bodyPr/>
                     <a:lstStyle/>
                     <a:p>
-                      <a:pPr indent="0" marL="0">
+                      <a:pPr marL="0" indent="0">
                         <a:buNone/>
                       </a:pPr>
                       <a:r>
@@ -8073,7 +8006,7 @@
                       </a:endParaRPr>
                     </a:p>
                   </a:txBody>
-                  <a:tcPr marL="91440" marR="91440" marT="45720" marB="45720" anchor="ctr">
+                  <a:tcPr anchor="ctr">
                     <a:lnL w="12700" cap="flat" cmpd="sng" algn="ctr">
                       <a:solidFill>
                         <a:srgbClr val="EEEEEE"/>
@@ -8115,6 +8048,11 @@
                     </a:solidFill>
                   </a:tcPr>
                 </a:tc>
+                <a:extLst>
+                  <a:ext uri="{0D108BD9-81ED-4DB2-BD59-A6C34878D82A}">
+                    <a16:rowId xmlns:a16="http://schemas.microsoft.com/office/drawing/2014/main" val="10005"/>
+                  </a:ext>
+                </a:extLst>
               </a:tr>
             </a:tbl>
           </a:graphicData>
@@ -8169,6 +8107,13 @@
             <a:prstDash val="solid"/>
           </a:ln>
         </p:spPr>
+        <p:txBody>
+          <a:bodyPr/>
+          <a:lstStyle/>
+          <a:p>
+            <a:endParaRPr lang="es-ES"/>
+          </a:p>
+        </p:txBody>
       </p:sp>
       <p:sp>
         <p:nvSpPr>
@@ -8191,7 +8136,7 @@
           <a:bodyPr wrap="square" rtlCol="0" anchor="ctr"/>
           <a:lstStyle/>
           <a:p>
-            <a:pPr indent="0" marL="0">
+            <a:pPr marL="0" indent="0">
               <a:buNone/>
             </a:pPr>
             <a:r>
@@ -8230,7 +8175,7 @@
           <a:bodyPr wrap="square" rtlCol="0" anchor="ctr"/>
           <a:lstStyle/>
           <a:p>
-            <a:pPr algn="r" indent="0" marL="0">
+            <a:pPr marL="0" indent="0" algn="r">
               <a:buNone/>
             </a:pPr>
             <a:r>
@@ -8257,7 +8202,7 @@
         <p:spPr>
           <a:xfrm>
             <a:off x="548640" y="2103120"/>
-            <a:ext cx="11091672" cy="1920240"/>
+            <a:ext cx="11091672" cy="2095656"/>
           </a:xfrm>
           <a:prstGeom prst="roundRect">
             <a:avLst/>
@@ -8272,6 +8217,13 @@
             <a:prstDash val="solid"/>
           </a:ln>
         </p:spPr>
+        <p:txBody>
+          <a:bodyPr/>
+          <a:lstStyle/>
+          <a:p>
+            <a:endParaRPr lang="es-ES"/>
+          </a:p>
+        </p:txBody>
       </p:sp>
       <p:sp>
         <p:nvSpPr>
@@ -8294,7 +8246,7 @@
           <a:bodyPr wrap="square" rtlCol="0" anchor="t"/>
           <a:lstStyle/>
           <a:p>
-            <a:pPr indent="0" marL="0">
+            <a:pPr marL="0" indent="0">
               <a:buNone/>
             </a:pPr>
             <a:r>
@@ -8312,7 +8264,7 @@
             <a:endParaRPr lang="en-US" sz="2000" dirty="0"/>
           </a:p>
           <a:p>
-            <a:pPr indent="0" marL="0">
+            <a:pPr marL="0" indent="0">
               <a:buNone/>
             </a:pPr>
             <a:r>
@@ -8379,6 +8331,13 @@
             <a:prstDash val="solid"/>
           </a:ln>
         </p:spPr>
+        <p:txBody>
+          <a:bodyPr/>
+          <a:lstStyle/>
+          <a:p>
+            <a:endParaRPr lang="es-ES"/>
+          </a:p>
+        </p:txBody>
       </p:sp>
       <p:sp>
         <p:nvSpPr>
@@ -8401,7 +8360,7 @@
           <a:bodyPr wrap="square" rtlCol="0" anchor="ctr"/>
           <a:lstStyle/>
           <a:p>
-            <a:pPr indent="0" marL="0">
+            <a:pPr marL="0" indent="0">
               <a:buNone/>
             </a:pPr>
             <a:r>
@@ -8440,7 +8399,7 @@
           <a:bodyPr wrap="square" rtlCol="0" anchor="ctr"/>
           <a:lstStyle/>
           <a:p>
-            <a:pPr algn="r" indent="0" marL="0">
+            <a:pPr marL="0" indent="0" algn="r">
               <a:buNone/>
             </a:pPr>
             <a:r>
@@ -8482,6 +8441,13 @@
             <a:prstDash val="solid"/>
           </a:ln>
         </p:spPr>
+        <p:txBody>
+          <a:bodyPr/>
+          <a:lstStyle/>
+          <a:p>
+            <a:endParaRPr lang="es-ES"/>
+          </a:p>
+        </p:txBody>
       </p:sp>
       <p:sp>
         <p:nvSpPr>
@@ -8504,7 +8470,7 @@
           <a:bodyPr wrap="square" rtlCol="0" anchor="t"/>
           <a:lstStyle/>
           <a:p>
-            <a:pPr indent="0" marL="0">
+            <a:pPr marL="0" indent="0">
               <a:buNone/>
             </a:pPr>
             <a:r>
@@ -8522,7 +8488,7 @@
             <a:endParaRPr lang="en-US" sz="1900" dirty="0"/>
           </a:p>
           <a:p>
-            <a:pPr indent="0" marL="0">
+            <a:pPr marL="0" indent="0">
               <a:buNone/>
             </a:pPr>
             <a:r>
@@ -8561,7 +8527,7 @@
           <a:bodyPr wrap="square" rtlCol="0" anchor="t"/>
           <a:lstStyle/>
           <a:p>
-            <a:pPr indent="0" marL="0">
+            <a:pPr marL="0" indent="0">
               <a:buNone/>
             </a:pPr>
             <a:r>
@@ -8628,6 +8594,13 @@
             <a:prstDash val="solid"/>
           </a:ln>
         </p:spPr>
+        <p:txBody>
+          <a:bodyPr/>
+          <a:lstStyle/>
+          <a:p>
+            <a:endParaRPr lang="es-ES"/>
+          </a:p>
+        </p:txBody>
       </p:sp>
       <p:sp>
         <p:nvSpPr>
@@ -8650,7 +8623,7 @@
           <a:bodyPr wrap="square" rtlCol="0" anchor="ctr"/>
           <a:lstStyle/>
           <a:p>
-            <a:pPr indent="0" marL="0">
+            <a:pPr marL="0" indent="0">
               <a:buNone/>
             </a:pPr>
             <a:r>
@@ -8689,7 +8662,7 @@
           <a:bodyPr wrap="square" rtlCol="0" anchor="ctr"/>
           <a:lstStyle/>
           <a:p>
-            <a:pPr algn="r" indent="0" marL="0">
+            <a:pPr marL="0" indent="0" algn="r">
               <a:buNone/>
             </a:pPr>
             <a:r>
@@ -8728,7 +8701,7 @@
           <a:bodyPr wrap="square" rtlCol="0" anchor="t"/>
           <a:lstStyle/>
           <a:p>
-            <a:pPr indent="0" marL="0">
+            <a:pPr marL="0" indent="0">
               <a:buNone/>
             </a:pPr>
             <a:r>
@@ -8770,6 +8743,13 @@
             <a:prstDash val="solid"/>
           </a:ln>
         </p:spPr>
+        <p:txBody>
+          <a:bodyPr/>
+          <a:lstStyle/>
+          <a:p>
+            <a:endParaRPr lang="es-ES"/>
+          </a:p>
+        </p:txBody>
       </p:sp>
       <p:sp>
         <p:nvSpPr>
@@ -8792,7 +8772,7 @@
           <a:bodyPr wrap="square" rtlCol="0" anchor="ctr"/>
           <a:lstStyle/>
           <a:p>
-            <a:pPr indent="0" marL="0">
+            <a:pPr marL="0" indent="0">
               <a:buNone/>
             </a:pPr>
             <a:r>
@@ -8859,6 +8839,13 @@
             <a:prstDash val="solid"/>
           </a:ln>
         </p:spPr>
+        <p:txBody>
+          <a:bodyPr/>
+          <a:lstStyle/>
+          <a:p>
+            <a:endParaRPr lang="es-ES"/>
+          </a:p>
+        </p:txBody>
       </p:sp>
       <p:sp>
         <p:nvSpPr>
@@ -8881,7 +8868,7 @@
           <a:bodyPr wrap="square" rtlCol="0" anchor="ctr"/>
           <a:lstStyle/>
           <a:p>
-            <a:pPr indent="0" marL="0">
+            <a:pPr marL="0" indent="0">
               <a:buNone/>
             </a:pPr>
             <a:r>
@@ -8920,7 +8907,7 @@
           <a:bodyPr wrap="square" rtlCol="0" anchor="ctr"/>
           <a:lstStyle/>
           <a:p>
-            <a:pPr algn="r" indent="0" marL="0">
+            <a:pPr marL="0" indent="0" algn="r">
               <a:buNone/>
             </a:pPr>
             <a:r>
@@ -8962,6 +8949,13 @@
             <a:prstDash val="solid"/>
           </a:ln>
         </p:spPr>
+        <p:txBody>
+          <a:bodyPr/>
+          <a:lstStyle/>
+          <a:p>
+            <a:endParaRPr lang="es-ES"/>
+          </a:p>
+        </p:txBody>
       </p:sp>
       <p:sp>
         <p:nvSpPr>
@@ -8987,6 +8981,13 @@
             <a:prstDash val="solid"/>
           </a:ln>
         </p:spPr>
+        <p:txBody>
+          <a:bodyPr/>
+          <a:lstStyle/>
+          <a:p>
+            <a:endParaRPr lang="es-ES"/>
+          </a:p>
+        </p:txBody>
       </p:sp>
       <p:sp>
         <p:nvSpPr>
@@ -9009,7 +9010,7 @@
           <a:bodyPr wrap="square" rtlCol="0" anchor="t"/>
           <a:lstStyle/>
           <a:p>
-            <a:pPr indent="0" marL="0">
+            <a:pPr marL="0" indent="0">
               <a:buNone/>
             </a:pPr>
             <a:r>
@@ -9026,7 +9027,7 @@
             <a:endParaRPr lang="en-US" sz="1150" dirty="0"/>
           </a:p>
           <a:p>
-            <a:pPr indent="0" marL="0">
+            <a:pPr marL="0" indent="0">
               <a:buNone/>
             </a:pPr>
             <a:r>
@@ -9043,7 +9044,7 @@
             <a:endParaRPr lang="en-US" sz="1150" dirty="0"/>
           </a:p>
           <a:p>
-            <a:pPr indent="0" marL="0">
+            <a:pPr marL="0" indent="0">
               <a:buNone/>
             </a:pPr>
             <a:r>
@@ -9060,13 +9061,13 @@
             <a:endParaRPr lang="en-US" sz="1150" dirty="0"/>
           </a:p>
           <a:p>
-            <a:pPr indent="0" marL="0">
+            <a:pPr marL="0" indent="0">
               <a:buNone/>
             </a:pPr>
             <a:endParaRPr lang="en-US" sz="1150" dirty="0"/>
           </a:p>
           <a:p>
-            <a:pPr indent="0" marL="0">
+            <a:pPr marL="0" indent="0">
               <a:buNone/>
             </a:pPr>
             <a:r>
@@ -9083,13 +9084,13 @@
             <a:endParaRPr lang="en-US" sz="1150" dirty="0"/>
           </a:p>
           <a:p>
-            <a:pPr indent="0" marL="0">
+            <a:pPr marL="0" indent="0">
               <a:buNone/>
             </a:pPr>
             <a:endParaRPr lang="en-US" sz="1150" dirty="0"/>
           </a:p>
           <a:p>
-            <a:pPr indent="0" marL="0">
+            <a:pPr marL="0" indent="0">
               <a:buNone/>
             </a:pPr>
             <a:r>
@@ -9106,7 +9107,7 @@
             <a:endParaRPr lang="en-US" sz="1150" dirty="0"/>
           </a:p>
           <a:p>
-            <a:pPr indent="0" marL="0">
+            <a:pPr marL="0" indent="0">
               <a:buNone/>
             </a:pPr>
             <a:r>
@@ -9123,7 +9124,7 @@
             <a:endParaRPr lang="en-US" sz="1150" dirty="0"/>
           </a:p>
           <a:p>
-            <a:pPr indent="0" marL="0">
+            <a:pPr marL="0" indent="0">
               <a:buNone/>
             </a:pPr>
             <a:r>
@@ -9140,13 +9141,13 @@
             <a:endParaRPr lang="en-US" sz="1150" dirty="0"/>
           </a:p>
           <a:p>
-            <a:pPr indent="0" marL="0">
+            <a:pPr marL="0" indent="0">
               <a:buNone/>
             </a:pPr>
             <a:endParaRPr lang="en-US" sz="1150" dirty="0"/>
           </a:p>
           <a:p>
-            <a:pPr indent="0" marL="0">
+            <a:pPr marL="0" indent="0">
               <a:buNone/>
             </a:pPr>
             <a:r>
@@ -9163,7 +9164,7 @@
             <a:endParaRPr lang="en-US" sz="1150" dirty="0"/>
           </a:p>
           <a:p>
-            <a:pPr indent="0" marL="0">
+            <a:pPr marL="0" indent="0">
               <a:buNone/>
             </a:pPr>
             <a:r>
@@ -9180,7 +9181,7 @@
             <a:endParaRPr lang="en-US" sz="1150" dirty="0"/>
           </a:p>
           <a:p>
-            <a:pPr indent="0" marL="0">
+            <a:pPr marL="0" indent="0">
               <a:buNone/>
             </a:pPr>
             <a:r>
@@ -9197,13 +9198,13 @@
             <a:endParaRPr lang="en-US" sz="1150" dirty="0"/>
           </a:p>
           <a:p>
-            <a:pPr indent="0" marL="0">
+            <a:pPr marL="0" indent="0">
               <a:buNone/>
             </a:pPr>
             <a:endParaRPr lang="en-US" sz="1150" dirty="0"/>
           </a:p>
           <a:p>
-            <a:pPr indent="0" marL="0">
+            <a:pPr marL="0" indent="0">
               <a:buNone/>
             </a:pPr>
             <a:r>
@@ -9220,7 +9221,7 @@
             <a:endParaRPr lang="en-US" sz="1150" dirty="0"/>
           </a:p>
           <a:p>
-            <a:pPr indent="0" marL="0">
+            <a:pPr marL="0" indent="0">
               <a:buNone/>
             </a:pPr>
             <a:r>
@@ -9237,7 +9238,7 @@
             <a:endParaRPr lang="en-US" sz="1150" dirty="0"/>
           </a:p>
           <a:p>
-            <a:pPr indent="0" marL="0">
+            <a:pPr marL="0" indent="0">
               <a:buNone/>
             </a:pPr>
             <a:r>
@@ -9254,7 +9255,7 @@
             <a:endParaRPr lang="en-US" sz="1150" dirty="0"/>
           </a:p>
           <a:p>
-            <a:pPr indent="0" marL="0">
+            <a:pPr marL="0" indent="0">
               <a:buNone/>
             </a:pPr>
             <a:r>
@@ -9271,7 +9272,7 @@
             <a:endParaRPr lang="en-US" sz="1150" dirty="0"/>
           </a:p>
           <a:p>
-            <a:pPr indent="0" marL="0">
+            <a:pPr marL="0" indent="0">
               <a:buNone/>
             </a:pPr>
             <a:r>
@@ -9338,6 +9339,13 @@
             <a:prstDash val="solid"/>
           </a:ln>
         </p:spPr>
+        <p:txBody>
+          <a:bodyPr/>
+          <a:lstStyle/>
+          <a:p>
+            <a:endParaRPr lang="es-ES"/>
+          </a:p>
+        </p:txBody>
       </p:sp>
       <p:sp>
         <p:nvSpPr>
@@ -9360,7 +9368,7 @@
           <a:bodyPr wrap="square" rtlCol="0" anchor="ctr"/>
           <a:lstStyle/>
           <a:p>
-            <a:pPr indent="0" marL="0">
+            <a:pPr marL="0" indent="0">
               <a:buNone/>
             </a:pPr>
             <a:r>
@@ -9399,7 +9407,7 @@
           <a:bodyPr wrap="square" rtlCol="0" anchor="ctr"/>
           <a:lstStyle/>
           <a:p>
-            <a:pPr algn="r" indent="0" marL="0">
+            <a:pPr marL="0" indent="0" algn="r">
               <a:buNone/>
             </a:pPr>
             <a:r>
@@ -9441,6 +9449,13 @@
             <a:prstDash val="solid"/>
           </a:ln>
         </p:spPr>
+        <p:txBody>
+          <a:bodyPr/>
+          <a:lstStyle/>
+          <a:p>
+            <a:endParaRPr lang="es-ES"/>
+          </a:p>
+        </p:txBody>
       </p:sp>
       <p:sp>
         <p:nvSpPr>
@@ -9463,7 +9478,7 @@
           <a:bodyPr wrap="square" rtlCol="0" anchor="ctr"/>
           <a:lstStyle/>
           <a:p>
-            <a:pPr indent="0" marL="0">
+            <a:pPr marL="0" indent="0">
               <a:buNone/>
             </a:pPr>
             <a:r>
@@ -9502,7 +9517,7 @@
           <a:bodyPr wrap="square" rtlCol="0" anchor="t"/>
           <a:lstStyle/>
           <a:p>
-            <a:pPr indent="0" marL="0">
+            <a:pPr marL="0" indent="0">
               <a:buNone/>
             </a:pPr>
             <a:r>
@@ -9569,6 +9584,13 @@
             <a:prstDash val="solid"/>
           </a:ln>
         </p:spPr>
+        <p:txBody>
+          <a:bodyPr/>
+          <a:lstStyle/>
+          <a:p>
+            <a:endParaRPr lang="es-ES"/>
+          </a:p>
+        </p:txBody>
       </p:sp>
       <p:sp>
         <p:nvSpPr>
@@ -9591,7 +9613,7 @@
           <a:bodyPr wrap="square" rtlCol="0" anchor="ctr"/>
           <a:lstStyle/>
           <a:p>
-            <a:pPr indent="0" marL="0">
+            <a:pPr marL="0" indent="0">
               <a:buNone/>
             </a:pPr>
             <a:r>
@@ -9630,7 +9652,7 @@
           <a:bodyPr wrap="square" rtlCol="0" anchor="ctr"/>
           <a:lstStyle/>
           <a:p>
-            <a:pPr algn="r" indent="0" marL="0">
+            <a:pPr marL="0" indent="0" algn="r">
               <a:buNone/>
             </a:pPr>
             <a:r>
@@ -9672,6 +9694,13 @@
             <a:prstDash val="solid"/>
           </a:ln>
         </p:spPr>
+        <p:txBody>
+          <a:bodyPr/>
+          <a:lstStyle/>
+          <a:p>
+            <a:endParaRPr lang="es-ES"/>
+          </a:p>
+        </p:txBody>
       </p:sp>
       <p:sp>
         <p:nvSpPr>
@@ -9697,6 +9726,13 @@
             <a:prstDash val="solid"/>
           </a:ln>
         </p:spPr>
+        <p:txBody>
+          <a:bodyPr/>
+          <a:lstStyle/>
+          <a:p>
+            <a:endParaRPr lang="es-ES"/>
+          </a:p>
+        </p:txBody>
       </p:sp>
       <p:sp>
         <p:nvSpPr>
@@ -9719,7 +9755,7 @@
           <a:bodyPr wrap="square" rtlCol="0" anchor="t"/>
           <a:lstStyle/>
           <a:p>
-            <a:pPr indent="0" marL="0">
+            <a:pPr marL="0" indent="0">
               <a:buNone/>
             </a:pPr>
             <a:r>
@@ -9736,7 +9772,7 @@
             <a:endParaRPr lang="en-US" sz="1250" dirty="0"/>
           </a:p>
           <a:p>
-            <a:pPr indent="0" marL="0">
+            <a:pPr marL="0" indent="0">
               <a:buNone/>
             </a:pPr>
             <a:r>
@@ -9753,7 +9789,7 @@
             <a:endParaRPr lang="en-US" sz="1250" dirty="0"/>
           </a:p>
           <a:p>
-            <a:pPr indent="0" marL="0">
+            <a:pPr marL="0" indent="0">
               <a:buNone/>
             </a:pPr>
             <a:r>
@@ -9770,7 +9806,7 @@
             <a:endParaRPr lang="en-US" sz="1250" dirty="0"/>
           </a:p>
           <a:p>
-            <a:pPr indent="0" marL="0">
+            <a:pPr marL="0" indent="0">
               <a:buNone/>
             </a:pPr>
             <a:r>
@@ -9787,7 +9823,7 @@
             <a:endParaRPr lang="en-US" sz="1250" dirty="0"/>
           </a:p>
           <a:p>
-            <a:pPr indent="0" marL="0">
+            <a:pPr marL="0" indent="0">
               <a:buNone/>
             </a:pPr>
             <a:r>
@@ -9804,7 +9840,7 @@
             <a:endParaRPr lang="en-US" sz="1250" dirty="0"/>
           </a:p>
           <a:p>
-            <a:pPr indent="0" marL="0">
+            <a:pPr marL="0" indent="0">
               <a:buNone/>
             </a:pPr>
             <a:r>
@@ -9821,7 +9857,7 @@
             <a:endParaRPr lang="en-US" sz="1250" dirty="0"/>
           </a:p>
           <a:p>
-            <a:pPr indent="0" marL="0">
+            <a:pPr marL="0" indent="0">
               <a:buNone/>
             </a:pPr>
             <a:r>
@@ -9838,7 +9874,7 @@
             <a:endParaRPr lang="en-US" sz="1250" dirty="0"/>
           </a:p>
           <a:p>
-            <a:pPr indent="0" marL="0">
+            <a:pPr marL="0" indent="0">
               <a:buNone/>
             </a:pPr>
             <a:r>
@@ -9855,7 +9891,7 @@
             <a:endParaRPr lang="en-US" sz="1250" dirty="0"/>
           </a:p>
           <a:p>
-            <a:pPr indent="0" marL="0">
+            <a:pPr marL="0" indent="0">
               <a:buNone/>
             </a:pPr>
             <a:r>
@@ -9872,7 +9908,7 @@
             <a:endParaRPr lang="en-US" sz="1250" dirty="0"/>
           </a:p>
           <a:p>
-            <a:pPr indent="0" marL="0">
+            <a:pPr marL="0" indent="0">
               <a:buNone/>
             </a:pPr>
             <a:r>
@@ -9889,7 +9925,7 @@
             <a:endParaRPr lang="en-US" sz="1250" dirty="0"/>
           </a:p>
           <a:p>
-            <a:pPr indent="0" marL="0">
+            <a:pPr marL="0" indent="0">
               <a:buNone/>
             </a:pPr>
             <a:r>
@@ -9906,7 +9942,7 @@
             <a:endParaRPr lang="en-US" sz="1250" dirty="0"/>
           </a:p>
           <a:p>
-            <a:pPr indent="0" marL="0">
+            <a:pPr marL="0" indent="0">
               <a:buNone/>
             </a:pPr>
             <a:r>
@@ -9923,7 +9959,7 @@
             <a:endParaRPr lang="en-US" sz="1250" dirty="0"/>
           </a:p>
           <a:p>
-            <a:pPr indent="0" marL="0">
+            <a:pPr marL="0" indent="0">
               <a:buNone/>
             </a:pPr>
             <a:r>
@@ -9940,7 +9976,7 @@
             <a:endParaRPr lang="en-US" sz="1250" dirty="0"/>
           </a:p>
           <a:p>
-            <a:pPr indent="0" marL="0">
+            <a:pPr marL="0" indent="0">
               <a:buNone/>
             </a:pPr>
             <a:r>
@@ -9957,7 +9993,7 @@
             <a:endParaRPr lang="en-US" sz="1250" dirty="0"/>
           </a:p>
           <a:p>
-            <a:pPr indent="0" marL="0">
+            <a:pPr marL="0" indent="0">
               <a:buNone/>
             </a:pPr>
             <a:r>
@@ -10024,6 +10060,13 @@
             <a:prstDash val="solid"/>
           </a:ln>
         </p:spPr>
+        <p:txBody>
+          <a:bodyPr/>
+          <a:lstStyle/>
+          <a:p>
+            <a:endParaRPr lang="es-ES"/>
+          </a:p>
+        </p:txBody>
       </p:sp>
       <p:sp>
         <p:nvSpPr>
@@ -10046,7 +10089,7 @@
           <a:bodyPr wrap="square" rtlCol="0" anchor="ctr"/>
           <a:lstStyle/>
           <a:p>
-            <a:pPr indent="0" marL="0">
+            <a:pPr marL="0" indent="0">
               <a:buNone/>
             </a:pPr>
             <a:r>
@@ -10085,7 +10128,7 @@
           <a:bodyPr wrap="square" rtlCol="0" anchor="ctr"/>
           <a:lstStyle/>
           <a:p>
-            <a:pPr algn="r" indent="0" marL="0">
+            <a:pPr marL="0" indent="0" algn="r">
               <a:buNone/>
             </a:pPr>
             <a:r>
@@ -10127,6 +10170,13 @@
             <a:prstDash val="solid"/>
           </a:ln>
         </p:spPr>
+        <p:txBody>
+          <a:bodyPr/>
+          <a:lstStyle/>
+          <a:p>
+            <a:endParaRPr lang="es-ES"/>
+          </a:p>
+        </p:txBody>
       </p:sp>
       <p:sp>
         <p:nvSpPr>
@@ -10149,7 +10199,7 @@
           <a:bodyPr wrap="square" rtlCol="0" anchor="ctr"/>
           <a:lstStyle/>
           <a:p>
-            <a:pPr indent="0" marL="0">
+            <a:pPr marL="0" indent="0">
               <a:buNone/>
             </a:pPr>
             <a:r>
@@ -10216,6 +10266,13 @@
             <a:prstDash val="solid"/>
           </a:ln>
         </p:spPr>
+        <p:txBody>
+          <a:bodyPr/>
+          <a:lstStyle/>
+          <a:p>
+            <a:endParaRPr lang="es-ES"/>
+          </a:p>
+        </p:txBody>
       </p:sp>
       <p:sp>
         <p:nvSpPr>
@@ -10238,7 +10295,7 @@
           <a:bodyPr wrap="square" rtlCol="0" anchor="ctr"/>
           <a:lstStyle/>
           <a:p>
-            <a:pPr indent="0" marL="0">
+            <a:pPr marL="0" indent="0">
               <a:buNone/>
             </a:pPr>
             <a:r>
@@ -10277,7 +10334,7 @@
           <a:bodyPr wrap="square" rtlCol="0" anchor="ctr"/>
           <a:lstStyle/>
           <a:p>
-            <a:pPr algn="r" indent="0" marL="0">
+            <a:pPr marL="0" indent="0" algn="r">
               <a:buNone/>
             </a:pPr>
             <a:r>
@@ -10316,7 +10373,7 @@
           <a:bodyPr wrap="square" rtlCol="0" anchor="t"/>
           <a:lstStyle/>
           <a:p>
-            <a:pPr indent="0" marL="0">
+            <a:pPr marL="0" indent="0">
               <a:buNone/>
             </a:pPr>
             <a:r>
@@ -10444,6 +10501,13 @@
             <a:prstDash val="solid"/>
           </a:ln>
         </p:spPr>
+        <p:txBody>
+          <a:bodyPr/>
+          <a:lstStyle/>
+          <a:p>
+            <a:endParaRPr lang="es-ES"/>
+          </a:p>
+        </p:txBody>
       </p:sp>
       <p:sp>
         <p:nvSpPr>
@@ -10466,7 +10530,7 @@
           <a:bodyPr wrap="square" rtlCol="0" anchor="ctr"/>
           <a:lstStyle/>
           <a:p>
-            <a:pPr indent="0" marL="0">
+            <a:pPr marL="0" indent="0">
               <a:buNone/>
             </a:pPr>
             <a:r>
@@ -10505,7 +10569,7 @@
           <a:bodyPr wrap="square" rtlCol="0" anchor="ctr"/>
           <a:lstStyle/>
           <a:p>
-            <a:pPr algn="r" indent="0" marL="0">
+            <a:pPr marL="0" indent="0" algn="r">
               <a:buNone/>
             </a:pPr>
             <a:r>
@@ -10675,6 +10739,13 @@
             <a:prstDash val="solid"/>
           </a:ln>
         </p:spPr>
+        <p:txBody>
+          <a:bodyPr/>
+          <a:lstStyle/>
+          <a:p>
+            <a:endParaRPr lang="es-ES"/>
+          </a:p>
+        </p:txBody>
       </p:sp>
       <p:sp>
         <p:nvSpPr>
@@ -10697,7 +10768,7 @@
           <a:bodyPr wrap="square" rtlCol="0" anchor="ctr"/>
           <a:lstStyle/>
           <a:p>
-            <a:pPr indent="0" marL="0">
+            <a:pPr marL="0" indent="0">
               <a:buNone/>
             </a:pPr>
             <a:r>
@@ -10736,7 +10807,7 @@
           <a:bodyPr wrap="square" rtlCol="0" anchor="ctr"/>
           <a:lstStyle/>
           <a:p>
-            <a:pPr algn="r" indent="0" marL="0">
+            <a:pPr marL="0" indent="0" algn="r">
               <a:buNone/>
             </a:pPr>
             <a:r>
@@ -10775,7 +10846,7 @@
           <a:bodyPr wrap="square" rtlCol="0" anchor="t"/>
           <a:lstStyle/>
           <a:p>
-            <a:pPr indent="0" marL="0">
+            <a:pPr marL="0" indent="0">
               <a:buNone/>
             </a:pPr>
             <a:r>
@@ -10817,6 +10888,13 @@
             <a:prstDash val="solid"/>
           </a:ln>
         </p:spPr>
+        <p:txBody>
+          <a:bodyPr/>
+          <a:lstStyle/>
+          <a:p>
+            <a:endParaRPr lang="es-ES"/>
+          </a:p>
+        </p:txBody>
       </p:sp>
       <p:sp>
         <p:nvSpPr>
@@ -10839,7 +10917,7 @@
           <a:bodyPr wrap="square" rtlCol="0" anchor="ctr"/>
           <a:lstStyle/>
           <a:p>
-            <a:pPr indent="0" marL="0">
+            <a:pPr marL="0" indent="0">
               <a:buNone/>
             </a:pPr>
             <a:r>
@@ -10906,6 +10984,13 @@
             <a:prstDash val="solid"/>
           </a:ln>
         </p:spPr>
+        <p:txBody>
+          <a:bodyPr/>
+          <a:lstStyle/>
+          <a:p>
+            <a:endParaRPr lang="es-ES"/>
+          </a:p>
+        </p:txBody>
       </p:sp>
       <p:sp>
         <p:nvSpPr>
@@ -10928,7 +11013,7 @@
           <a:bodyPr wrap="square" rtlCol="0" anchor="ctr"/>
           <a:lstStyle/>
           <a:p>
-            <a:pPr indent="0" marL="0">
+            <a:pPr marL="0" indent="0">
               <a:buNone/>
             </a:pPr>
             <a:r>
@@ -10967,7 +11052,7 @@
           <a:bodyPr wrap="square" rtlCol="0" anchor="ctr"/>
           <a:lstStyle/>
           <a:p>
-            <a:pPr algn="r" indent="0" marL="0">
+            <a:pPr marL="0" indent="0" algn="r">
               <a:buNone/>
             </a:pPr>
             <a:r>
@@ -11137,6 +11222,13 @@
             <a:prstDash val="solid"/>
           </a:ln>
         </p:spPr>
+        <p:txBody>
+          <a:bodyPr/>
+          <a:lstStyle/>
+          <a:p>
+            <a:endParaRPr lang="es-ES"/>
+          </a:p>
+        </p:txBody>
       </p:sp>
       <p:sp>
         <p:nvSpPr>
@@ -11159,7 +11251,7 @@
           <a:bodyPr wrap="square" rtlCol="0" anchor="ctr"/>
           <a:lstStyle/>
           <a:p>
-            <a:pPr indent="0" marL="0">
+            <a:pPr marL="0" indent="0">
               <a:buNone/>
             </a:pPr>
             <a:r>
@@ -11198,7 +11290,7 @@
           <a:bodyPr wrap="square" rtlCol="0" anchor="ctr"/>
           <a:lstStyle/>
           <a:p>
-            <a:pPr algn="r" indent="0" marL="0">
+            <a:pPr marL="0" indent="0" algn="r">
               <a:buNone/>
             </a:pPr>
             <a:r>
@@ -11240,6 +11332,13 @@
             <a:prstDash val="solid"/>
           </a:ln>
         </p:spPr>
+        <p:txBody>
+          <a:bodyPr/>
+          <a:lstStyle/>
+          <a:p>
+            <a:endParaRPr lang="es-ES"/>
+          </a:p>
+        </p:txBody>
       </p:sp>
       <p:sp>
         <p:nvSpPr>
@@ -11265,6 +11364,13 @@
             <a:prstDash val="solid"/>
           </a:ln>
         </p:spPr>
+        <p:txBody>
+          <a:bodyPr/>
+          <a:lstStyle/>
+          <a:p>
+            <a:endParaRPr lang="es-ES"/>
+          </a:p>
+        </p:txBody>
       </p:sp>
       <p:sp>
         <p:nvSpPr>
@@ -11287,7 +11393,7 @@
           <a:bodyPr wrap="square" rtlCol="0" anchor="t"/>
           <a:lstStyle/>
           <a:p>
-            <a:pPr indent="0" marL="0">
+            <a:pPr marL="0" indent="0">
               <a:buNone/>
             </a:pPr>
             <a:r>
@@ -11307,7 +11413,7 @@
       </p:sp>
       <p:graphicFrame>
         <p:nvGraphicFramePr>
-          <p:cNvPr id="5" name="Table 0"/>
+          <p:cNvPr id="8" name="Table 0"/>
           <p:cNvGraphicFramePr>
             <a:graphicFrameLocks noGrp="1"/>
           </p:cNvGraphicFramePr>
@@ -11321,15 +11427,27 @@
         </p:nvGraphicFramePr>
         <p:xfrm>
           <a:off x="548640" y="2148840"/>
-          <a:ext cx="11091672" cy="914400"/>
+          <a:ext cx="11091672" cy="2331720"/>
         </p:xfrm>
         <a:graphic>
           <a:graphicData uri="http://schemas.openxmlformats.org/drawingml/2006/table">
             <a:tbl>
               <a:tblPr/>
               <a:tblGrid>
-                <a:gridCol w="4436669"/>
-                <a:gridCol w="6655003"/>
+                <a:gridCol w="4436669">
+                  <a:extLst>
+                    <a:ext uri="{9D8B030D-6E8A-4147-A177-3AD203B41FA5}">
+                      <a16:colId xmlns:a16="http://schemas.microsoft.com/office/drawing/2014/main" val="20000"/>
+                    </a:ext>
+                  </a:extLst>
+                </a:gridCol>
+                <a:gridCol w="6655003">
+                  <a:extLst>
+                    <a:ext uri="{9D8B030D-6E8A-4147-A177-3AD203B41FA5}">
+                      <a16:colId xmlns:a16="http://schemas.microsoft.com/office/drawing/2014/main" val="20001"/>
+                    </a:ext>
+                  </a:extLst>
+                </a:gridCol>
               </a:tblGrid>
               <a:tr h="777240">
                 <a:tc>
@@ -11337,7 +11455,7 @@
                     <a:bodyPr/>
                     <a:lstStyle/>
                     <a:p>
-                      <a:pPr algn="ctr" indent="0" marL="0">
+                      <a:pPr marL="0" indent="0" algn="ctr">
                         <a:buNone/>
                       </a:pPr>
                       <a:r>
@@ -11358,7 +11476,7 @@
                       </a:endParaRPr>
                     </a:p>
                   </a:txBody>
-                  <a:tcPr marL="91440" marR="91440" marT="45720" marB="45720" anchor="ctr">
+                  <a:tcPr anchor="ctr">
                     <a:lnL w="12700" cap="flat" cmpd="sng" algn="ctr">
                       <a:solidFill>
                         <a:srgbClr val="EEEEEE"/>
@@ -11405,7 +11523,7 @@
                     <a:bodyPr/>
                     <a:lstStyle/>
                     <a:p>
-                      <a:pPr algn="ctr" indent="0" marL="0">
+                      <a:pPr marL="0" indent="0" algn="ctr">
                         <a:buNone/>
                       </a:pPr>
                       <a:r>
@@ -11426,7 +11544,7 @@
                       </a:endParaRPr>
                     </a:p>
                   </a:txBody>
-                  <a:tcPr marL="91440" marR="91440" marT="45720" marB="45720" anchor="ctr">
+                  <a:tcPr anchor="ctr">
                     <a:lnL w="12700" cap="flat" cmpd="sng" algn="ctr">
                       <a:solidFill>
                         <a:srgbClr val="EEEEEE"/>
@@ -11468,6 +11586,11 @@
                     </a:solidFill>
                   </a:tcPr>
                 </a:tc>
+                <a:extLst>
+                  <a:ext uri="{0D108BD9-81ED-4DB2-BD59-A6C34878D82A}">
+                    <a16:rowId xmlns:a16="http://schemas.microsoft.com/office/drawing/2014/main" val="10000"/>
+                  </a:ext>
+                </a:extLst>
               </a:tr>
               <a:tr h="777240">
                 <a:tc>
@@ -11475,7 +11598,7 @@
                     <a:bodyPr/>
                     <a:lstStyle/>
                     <a:p>
-                      <a:pPr indent="0" marL="0">
+                      <a:pPr marL="0" indent="0">
                         <a:buNone/>
                       </a:pPr>
                       <a:r>
@@ -11496,7 +11619,7 @@
                       </a:endParaRPr>
                     </a:p>
                   </a:txBody>
-                  <a:tcPr marL="91440" marR="91440" marT="45720" marB="45720" anchor="ctr">
+                  <a:tcPr anchor="ctr">
                     <a:lnL w="12700" cap="flat" cmpd="sng" algn="ctr">
                       <a:solidFill>
                         <a:srgbClr val="EEEEEE"/>
@@ -11543,7 +11666,7 @@
                     <a:bodyPr/>
                     <a:lstStyle/>
                     <a:p>
-                      <a:pPr indent="0" marL="0">
+                      <a:pPr marL="0" indent="0">
                         <a:buNone/>
                       </a:pPr>
                       <a:r>
@@ -11564,7 +11687,7 @@
                       </a:endParaRPr>
                     </a:p>
                   </a:txBody>
-                  <a:tcPr marL="91440" marR="91440" marT="45720" marB="45720" anchor="ctr">
+                  <a:tcPr anchor="ctr">
                     <a:lnL w="12700" cap="flat" cmpd="sng" algn="ctr">
                       <a:solidFill>
                         <a:srgbClr val="EEEEEE"/>
@@ -11606,6 +11729,11 @@
                     </a:solidFill>
                   </a:tcPr>
                 </a:tc>
+                <a:extLst>
+                  <a:ext uri="{0D108BD9-81ED-4DB2-BD59-A6C34878D82A}">
+                    <a16:rowId xmlns:a16="http://schemas.microsoft.com/office/drawing/2014/main" val="10001"/>
+                  </a:ext>
+                </a:extLst>
               </a:tr>
               <a:tr h="777240">
                 <a:tc>
@@ -11613,7 +11741,7 @@
                     <a:bodyPr/>
                     <a:lstStyle/>
                     <a:p>
-                      <a:pPr indent="0" marL="0">
+                      <a:pPr marL="0" indent="0">
                         <a:buNone/>
                       </a:pPr>
                       <a:r>
@@ -11634,7 +11762,7 @@
                       </a:endParaRPr>
                     </a:p>
                   </a:txBody>
-                  <a:tcPr marL="91440" marR="91440" marT="45720" marB="45720" anchor="ctr">
+                  <a:tcPr anchor="ctr">
                     <a:lnL w="12700" cap="flat" cmpd="sng" algn="ctr">
                       <a:solidFill>
                         <a:srgbClr val="EEEEEE"/>
@@ -11681,7 +11809,7 @@
                     <a:bodyPr/>
                     <a:lstStyle/>
                     <a:p>
-                      <a:pPr indent="0" marL="0">
+                      <a:pPr marL="0" indent="0">
                         <a:buNone/>
                       </a:pPr>
                       <a:r>
@@ -11702,7 +11830,7 @@
                       </a:endParaRPr>
                     </a:p>
                   </a:txBody>
-                  <a:tcPr marL="91440" marR="91440" marT="45720" marB="45720" anchor="ctr">
+                  <a:tcPr anchor="ctr">
                     <a:lnL w="12700" cap="flat" cmpd="sng" algn="ctr">
                       <a:solidFill>
                         <a:srgbClr val="EEEEEE"/>
@@ -11744,6 +11872,11 @@
                     </a:solidFill>
                   </a:tcPr>
                 </a:tc>
+                <a:extLst>
+                  <a:ext uri="{0D108BD9-81ED-4DB2-BD59-A6C34878D82A}">
+                    <a16:rowId xmlns:a16="http://schemas.microsoft.com/office/drawing/2014/main" val="10002"/>
+                  </a:ext>
+                </a:extLst>
               </a:tr>
             </a:tbl>
           </a:graphicData>
@@ -11770,7 +11903,7 @@
           <a:bodyPr wrap="square" rtlCol="0" anchor="t"/>
           <a:lstStyle/>
           <a:p>
-            <a:pPr indent="0" marL="0">
+            <a:pPr marL="0" indent="0">
               <a:buNone/>
             </a:pPr>
             <a:r>
@@ -11837,6 +11970,13 @@
             <a:prstDash val="solid"/>
           </a:ln>
         </p:spPr>
+        <p:txBody>
+          <a:bodyPr/>
+          <a:lstStyle/>
+          <a:p>
+            <a:endParaRPr lang="es-ES"/>
+          </a:p>
+        </p:txBody>
       </p:sp>
       <p:sp>
         <p:nvSpPr>
@@ -11859,7 +11999,7 @@
           <a:bodyPr wrap="square" rtlCol="0" anchor="ctr"/>
           <a:lstStyle/>
           <a:p>
-            <a:pPr indent="0" marL="0">
+            <a:pPr marL="0" indent="0">
               <a:buNone/>
             </a:pPr>
             <a:r>
@@ -11898,7 +12038,7 @@
           <a:bodyPr wrap="square" rtlCol="0" anchor="ctr"/>
           <a:lstStyle/>
           <a:p>
-            <a:pPr algn="r" indent="0" marL="0">
+            <a:pPr marL="0" indent="0" algn="r">
               <a:buNone/>
             </a:pPr>
             <a:r>
@@ -11940,6 +12080,13 @@
             <a:prstDash val="solid"/>
           </a:ln>
         </p:spPr>
+        <p:txBody>
+          <a:bodyPr/>
+          <a:lstStyle/>
+          <a:p>
+            <a:endParaRPr lang="es-ES"/>
+          </a:p>
+        </p:txBody>
       </p:sp>
       <p:sp>
         <p:nvSpPr>
@@ -11962,7 +12109,7 @@
           <a:bodyPr wrap="square" rtlCol="0" anchor="ctr"/>
           <a:lstStyle/>
           <a:p>
-            <a:pPr indent="0" marL="0">
+            <a:pPr marL="0" indent="0">
               <a:buNone/>
             </a:pPr>
             <a:r>
@@ -12001,7 +12148,7 @@
           <a:bodyPr wrap="square" rtlCol="0" anchor="t"/>
           <a:lstStyle/>
           <a:p>
-            <a:pPr indent="0" marL="0">
+            <a:pPr marL="0" indent="0">
               <a:buNone/>
             </a:pPr>
             <a:r>
@@ -12068,6 +12215,13 @@
             <a:prstDash val="solid"/>
           </a:ln>
         </p:spPr>
+        <p:txBody>
+          <a:bodyPr/>
+          <a:lstStyle/>
+          <a:p>
+            <a:endParaRPr lang="es-ES"/>
+          </a:p>
+        </p:txBody>
       </p:sp>
       <p:sp>
         <p:nvSpPr>
@@ -12090,7 +12244,7 @@
           <a:bodyPr wrap="square" rtlCol="0" anchor="ctr"/>
           <a:lstStyle/>
           <a:p>
-            <a:pPr indent="0" marL="0">
+            <a:pPr marL="0" indent="0">
               <a:buNone/>
             </a:pPr>
             <a:r>
@@ -12129,7 +12283,7 @@
           <a:bodyPr wrap="square" rtlCol="0" anchor="ctr"/>
           <a:lstStyle/>
           <a:p>
-            <a:pPr algn="r" indent="0" marL="0">
+            <a:pPr marL="0" indent="0" algn="r">
               <a:buNone/>
             </a:pPr>
             <a:r>
@@ -12171,6 +12325,13 @@
             <a:prstDash val="solid"/>
           </a:ln>
         </p:spPr>
+        <p:txBody>
+          <a:bodyPr/>
+          <a:lstStyle/>
+          <a:p>
+            <a:endParaRPr lang="es-ES"/>
+          </a:p>
+        </p:txBody>
       </p:sp>
       <p:sp>
         <p:nvSpPr>
@@ -12193,7 +12354,7 @@
           <a:bodyPr wrap="square" rtlCol="0" anchor="ctr"/>
           <a:lstStyle/>
           <a:p>
-            <a:pPr indent="0" marL="0">
+            <a:pPr marL="0" indent="0">
               <a:buNone/>
             </a:pPr>
             <a:r>
@@ -12260,6 +12421,13 @@
             <a:prstDash val="solid"/>
           </a:ln>
         </p:spPr>
+        <p:txBody>
+          <a:bodyPr/>
+          <a:lstStyle/>
+          <a:p>
+            <a:endParaRPr lang="es-ES"/>
+          </a:p>
+        </p:txBody>
       </p:sp>
       <p:sp>
         <p:nvSpPr>
@@ -12282,7 +12450,7 @@
           <a:bodyPr wrap="square" rtlCol="0" anchor="ctr"/>
           <a:lstStyle/>
           <a:p>
-            <a:pPr indent="0" marL="0">
+            <a:pPr marL="0" indent="0">
               <a:buNone/>
             </a:pPr>
             <a:r>
@@ -12321,7 +12489,7 @@
           <a:bodyPr wrap="square" rtlCol="0" anchor="ctr"/>
           <a:lstStyle/>
           <a:p>
-            <a:pPr algn="r" indent="0" marL="0">
+            <a:pPr marL="0" indent="0" algn="r">
               <a:buNone/>
             </a:pPr>
             <a:r>
@@ -12341,22 +12509,22 @@
       </p:sp>
       <p:pic>
         <p:nvPicPr>
-          <p:cNvPr id="5" name="Image 0" descr="C:/Users/Aitor/docxgen/img/psp-t2-basic-ok.png">    </p:cNvPr>
+          <p:cNvPr id="5" name="Image 0" descr="C:/Users/Aitor/docxgen/img/psp-t2-basic-ok.png"/>
           <p:cNvPicPr>
             <a:picLocks noChangeAspect="1"/>
           </p:cNvPicPr>
           <p:nvPr/>
         </p:nvPicPr>
         <p:blipFill>
-          <a:blip r:embed="rId1"/>
+          <a:blip r:embed="rId3"/>
           <a:stretch>
             <a:fillRect/>
           </a:stretch>
         </p:blipFill>
         <p:spPr>
           <a:xfrm>
-            <a:off x="914754" y="1554480"/>
-            <a:ext cx="10359444" cy="4206240"/>
+            <a:off x="158974" y="1134603"/>
+            <a:ext cx="11752043" cy="4771676"/>
           </a:xfrm>
           <a:prstGeom prst="rect">
             <a:avLst/>
@@ -12412,6 +12580,13 @@
             <a:prstDash val="solid"/>
           </a:ln>
         </p:spPr>
+        <p:txBody>
+          <a:bodyPr/>
+          <a:lstStyle/>
+          <a:p>
+            <a:endParaRPr lang="es-ES"/>
+          </a:p>
+        </p:txBody>
       </p:sp>
       <p:sp>
         <p:nvSpPr>
@@ -12434,7 +12609,7 @@
           <a:bodyPr wrap="square" rtlCol="0" anchor="ctr"/>
           <a:lstStyle/>
           <a:p>
-            <a:pPr indent="0" marL="0">
+            <a:pPr marL="0" indent="0">
               <a:buNone/>
             </a:pPr>
             <a:r>
@@ -12473,7 +12648,7 @@
           <a:bodyPr wrap="square" rtlCol="0" anchor="ctr"/>
           <a:lstStyle/>
           <a:p>
-            <a:pPr algn="r" indent="0" marL="0">
+            <a:pPr marL="0" indent="0" algn="r">
               <a:buNone/>
             </a:pPr>
             <a:r>
@@ -12512,7 +12687,7 @@
           <a:bodyPr wrap="square" rtlCol="0" anchor="t"/>
           <a:lstStyle/>
           <a:p>
-            <a:pPr indent="0" marL="0">
+            <a:pPr marL="0" indent="0">
               <a:buNone/>
             </a:pPr>
             <a:r>
@@ -12554,6 +12729,13 @@
             <a:prstDash val="solid"/>
           </a:ln>
         </p:spPr>
+        <p:txBody>
+          <a:bodyPr/>
+          <a:lstStyle/>
+          <a:p>
+            <a:endParaRPr lang="es-ES"/>
+          </a:p>
+        </p:txBody>
       </p:sp>
       <p:sp>
         <p:nvSpPr>
@@ -12576,7 +12758,7 @@
           <a:bodyPr wrap="square" rtlCol="0" anchor="ctr"/>
           <a:lstStyle/>
           <a:p>
-            <a:pPr indent="0" marL="0">
+            <a:pPr marL="0" indent="0">
               <a:buNone/>
             </a:pPr>
             <a:r>
@@ -12643,6 +12825,13 @@
             <a:prstDash val="solid"/>
           </a:ln>
         </p:spPr>
+        <p:txBody>
+          <a:bodyPr/>
+          <a:lstStyle/>
+          <a:p>
+            <a:endParaRPr lang="es-ES"/>
+          </a:p>
+        </p:txBody>
       </p:sp>
       <p:sp>
         <p:nvSpPr>
@@ -12665,7 +12854,7 @@
           <a:bodyPr wrap="square" rtlCol="0" anchor="ctr"/>
           <a:lstStyle/>
           <a:p>
-            <a:pPr indent="0" marL="0">
+            <a:pPr marL="0" indent="0">
               <a:buNone/>
             </a:pPr>
             <a:r>
@@ -12704,7 +12893,7 @@
           <a:bodyPr wrap="square" rtlCol="0" anchor="ctr"/>
           <a:lstStyle/>
           <a:p>
-            <a:pPr algn="r" indent="0" marL="0">
+            <a:pPr marL="0" indent="0" algn="r">
               <a:buNone/>
             </a:pPr>
             <a:r>
@@ -12743,7 +12932,7 @@
           <a:bodyPr wrap="square" rtlCol="0" anchor="t"/>
           <a:lstStyle/>
           <a:p>
-            <a:pPr indent="0" marL="0">
+            <a:pPr marL="0" indent="0">
               <a:buNone/>
             </a:pPr>
             <a:r>
@@ -12763,22 +12952,22 @@
       </p:sp>
       <p:pic>
         <p:nvPicPr>
-          <p:cNvPr id="6" name="Image 0" descr="C:/Users/Aitor/docxgen/img/psp-t2-basic-sin-cabecera.png">    </p:cNvPr>
+          <p:cNvPr id="6" name="Image 0" descr="C:/Users/Aitor/docxgen/img/psp-t2-basic-sin-cabecera.png"/>
           <p:cNvPicPr>
             <a:picLocks noChangeAspect="1"/>
           </p:cNvPicPr>
           <p:nvPr/>
         </p:nvPicPr>
         <p:blipFill>
-          <a:blip r:embed="rId1"/>
+          <a:blip r:embed="rId3"/>
           <a:stretch>
             <a:fillRect/>
           </a:stretch>
         </p:blipFill>
         <p:spPr>
           <a:xfrm>
-            <a:off x="628948" y="2286000"/>
-            <a:ext cx="10931056" cy="2971800"/>
+            <a:off x="109144" y="2139696"/>
+            <a:ext cx="11973711" cy="3255264"/>
           </a:xfrm>
           <a:prstGeom prst="rect">
             <a:avLst/>
@@ -13086,4 +13275,319 @@
     </a:ext>
   </a:extLst>
 </a:theme>
+</file>
+
+<file path=ppt/theme/theme2.xml><?xml version="1.0" encoding="utf-8"?>
+<a:theme xmlns:a="http://schemas.openxmlformats.org/drawingml/2006/main" name="Tema de Office">
+  <a:themeElements>
+    <a:clrScheme name="Office">
+      <a:dk1>
+        <a:sysClr val="windowText" lastClr="000000"/>
+      </a:dk1>
+      <a:lt1>
+        <a:sysClr val="window" lastClr="FFFFFF"/>
+      </a:lt1>
+      <a:dk2>
+        <a:srgbClr val="0E2841"/>
+      </a:dk2>
+      <a:lt2>
+        <a:srgbClr val="E8E8E8"/>
+      </a:lt2>
+      <a:accent1>
+        <a:srgbClr val="156082"/>
+      </a:accent1>
+      <a:accent2>
+        <a:srgbClr val="E97132"/>
+      </a:accent2>
+      <a:accent3>
+        <a:srgbClr val="196B24"/>
+      </a:accent3>
+      <a:accent4>
+        <a:srgbClr val="0F9ED5"/>
+      </a:accent4>
+      <a:accent5>
+        <a:srgbClr val="A02B93"/>
+      </a:accent5>
+      <a:accent6>
+        <a:srgbClr val="4EA72E"/>
+      </a:accent6>
+      <a:hlink>
+        <a:srgbClr val="467886"/>
+      </a:hlink>
+      <a:folHlink>
+        <a:srgbClr val="96607D"/>
+      </a:folHlink>
+    </a:clrScheme>
+    <a:fontScheme name="Office">
+      <a:majorFont>
+        <a:latin typeface="Aptos Display" panose="02110004020202020204"/>
+        <a:ea typeface=""/>
+        <a:cs typeface=""/>
+        <a:font script="Jpan" typeface="游ゴシック Light"/>
+        <a:font script="Hang" typeface="맑은 고딕"/>
+        <a:font script="Hans" typeface="等线 Light"/>
+        <a:font script="Hant" typeface="新細明體"/>
+        <a:font script="Arab" typeface="Times New Roman"/>
+        <a:font script="Hebr" typeface="Times New Roman"/>
+        <a:font script="Thai" typeface="Angsana New"/>
+        <a:font script="Ethi" typeface="Nyala"/>
+        <a:font script="Beng" typeface="Vrinda"/>
+        <a:font script="Gujr" typeface="Shruti"/>
+        <a:font script="Khmr" typeface="MoolBoran"/>
+        <a:font script="Knda" typeface="Tunga"/>
+        <a:font script="Guru" typeface="Raavi"/>
+        <a:font script="Cans" typeface="Euphemia"/>
+        <a:font script="Cher" typeface="Plantagenet Cherokee"/>
+        <a:font script="Yiii" typeface="Microsoft Yi Baiti"/>
+        <a:font script="Tibt" typeface="Microsoft Himalaya"/>
+        <a:font script="Thaa" typeface="MV Boli"/>
+        <a:font script="Deva" typeface="Mangal"/>
+        <a:font script="Telu" typeface="Gautami"/>
+        <a:font script="Taml" typeface="Latha"/>
+        <a:font script="Syrc" typeface="Estrangelo Edessa"/>
+        <a:font script="Orya" typeface="Kalinga"/>
+        <a:font script="Mlym" typeface="Kartika"/>
+        <a:font script="Laoo" typeface="DokChampa"/>
+        <a:font script="Sinh" typeface="Iskoola Pota"/>
+        <a:font script="Mong" typeface="Mongolian Baiti"/>
+        <a:font script="Viet" typeface="Times New Roman"/>
+        <a:font script="Uigh" typeface="Microsoft Uighur"/>
+        <a:font script="Geor" typeface="Sylfaen"/>
+        <a:font script="Armn" typeface="Arial"/>
+        <a:font script="Bugi" typeface="Leelawadee UI"/>
+        <a:font script="Bopo" typeface="Microsoft JhengHei"/>
+        <a:font script="Java" typeface="Javanese Text"/>
+        <a:font script="Lisu" typeface="Segoe UI"/>
+        <a:font script="Mymr" typeface="Myanmar Text"/>
+        <a:font script="Nkoo" typeface="Ebrima"/>
+        <a:font script="Olck" typeface="Nirmala UI"/>
+        <a:font script="Osma" typeface="Ebrima"/>
+        <a:font script="Phag" typeface="Phagspa"/>
+        <a:font script="Syrn" typeface="Estrangelo Edessa"/>
+        <a:font script="Syrj" typeface="Estrangelo Edessa"/>
+        <a:font script="Syre" typeface="Estrangelo Edessa"/>
+        <a:font script="Sora" typeface="Nirmala UI"/>
+        <a:font script="Tale" typeface="Microsoft Tai Le"/>
+        <a:font script="Talu" typeface="Microsoft New Tai Lue"/>
+        <a:font script="Tfng" typeface="Ebrima"/>
+      </a:majorFont>
+      <a:minorFont>
+        <a:latin typeface="Aptos" panose="02110004020202020204"/>
+        <a:ea typeface=""/>
+        <a:cs typeface=""/>
+        <a:font script="Jpan" typeface="游ゴシック"/>
+        <a:font script="Hang" typeface="맑은 고딕"/>
+        <a:font script="Hans" typeface="等线"/>
+        <a:font script="Hant" typeface="新細明體"/>
+        <a:font script="Arab" typeface="Arial"/>
+        <a:font script="Hebr" typeface="Arial"/>
+        <a:font script="Thai" typeface="Cordia New"/>
+        <a:font script="Ethi" typeface="Nyala"/>
+        <a:font script="Beng" typeface="Vrinda"/>
+        <a:font script="Gujr" typeface="Shruti"/>
+        <a:font script="Khmr" typeface="DaunPenh"/>
+        <a:font script="Knda" typeface="Tunga"/>
+        <a:font script="Guru" typeface="Raavi"/>
+        <a:font script="Cans" typeface="Euphemia"/>
+        <a:font script="Cher" typeface="Plantagenet Cherokee"/>
+        <a:font script="Yiii" typeface="Microsoft Yi Baiti"/>
+        <a:font script="Tibt" typeface="Microsoft Himalaya"/>
+        <a:font script="Thaa" typeface="MV Boli"/>
+        <a:font script="Deva" typeface="Mangal"/>
+        <a:font script="Telu" typeface="Gautami"/>
+        <a:font script="Taml" typeface="Latha"/>
+        <a:font script="Syrc" typeface="Estrangelo Edessa"/>
+        <a:font script="Orya" typeface="Kalinga"/>
+        <a:font script="Mlym" typeface="Kartika"/>
+        <a:font script="Laoo" typeface="DokChampa"/>
+        <a:font script="Sinh" typeface="Iskoola Pota"/>
+        <a:font script="Mong" typeface="Mongolian Baiti"/>
+        <a:font script="Viet" typeface="Arial"/>
+        <a:font script="Uigh" typeface="Microsoft Uighur"/>
+        <a:font script="Geor" typeface="Sylfaen"/>
+        <a:font script="Armn" typeface="Arial"/>
+        <a:font script="Bugi" typeface="Leelawadee UI"/>
+        <a:font script="Bopo" typeface="Microsoft JhengHei"/>
+        <a:font script="Java" typeface="Javanese Text"/>
+        <a:font script="Lisu" typeface="Segoe UI"/>
+        <a:font script="Mymr" typeface="Myanmar Text"/>
+        <a:font script="Nkoo" typeface="Ebrima"/>
+        <a:font script="Olck" typeface="Nirmala UI"/>
+        <a:font script="Osma" typeface="Ebrima"/>
+        <a:font script="Phag" typeface="Phagspa"/>
+        <a:font script="Syrn" typeface="Estrangelo Edessa"/>
+        <a:font script="Syrj" typeface="Estrangelo Edessa"/>
+        <a:font script="Syre" typeface="Estrangelo Edessa"/>
+        <a:font script="Sora" typeface="Nirmala UI"/>
+        <a:font script="Tale" typeface="Microsoft Tai Le"/>
+        <a:font script="Talu" typeface="Microsoft New Tai Lue"/>
+        <a:font script="Tfng" typeface="Ebrima"/>
+      </a:minorFont>
+    </a:fontScheme>
+    <a:fmtScheme name="Office">
+      <a:fillStyleLst>
+        <a:solidFill>
+          <a:schemeClr val="phClr"/>
+        </a:solidFill>
+        <a:gradFill rotWithShape="1">
+          <a:gsLst>
+            <a:gs pos="0">
+              <a:schemeClr val="phClr">
+                <a:lumMod val="110000"/>
+                <a:satMod val="105000"/>
+                <a:tint val="67000"/>
+              </a:schemeClr>
+            </a:gs>
+            <a:gs pos="50000">
+              <a:schemeClr val="phClr">
+                <a:lumMod val="105000"/>
+                <a:satMod val="103000"/>
+                <a:tint val="73000"/>
+              </a:schemeClr>
+            </a:gs>
+            <a:gs pos="100000">
+              <a:schemeClr val="phClr">
+                <a:lumMod val="105000"/>
+                <a:satMod val="109000"/>
+                <a:tint val="81000"/>
+              </a:schemeClr>
+            </a:gs>
+          </a:gsLst>
+          <a:lin ang="5400000" scaled="0"/>
+        </a:gradFill>
+        <a:gradFill rotWithShape="1">
+          <a:gsLst>
+            <a:gs pos="0">
+              <a:schemeClr val="phClr">
+                <a:satMod val="103000"/>
+                <a:lumMod val="102000"/>
+                <a:tint val="94000"/>
+              </a:schemeClr>
+            </a:gs>
+            <a:gs pos="50000">
+              <a:schemeClr val="phClr">
+                <a:satMod val="110000"/>
+                <a:lumMod val="100000"/>
+                <a:shade val="100000"/>
+              </a:schemeClr>
+            </a:gs>
+            <a:gs pos="100000">
+              <a:schemeClr val="phClr">
+                <a:lumMod val="99000"/>
+                <a:satMod val="120000"/>
+                <a:shade val="78000"/>
+              </a:schemeClr>
+            </a:gs>
+          </a:gsLst>
+          <a:lin ang="5400000" scaled="0"/>
+        </a:gradFill>
+      </a:fillStyleLst>
+      <a:lnStyleLst>
+        <a:ln w="12700" cap="flat" cmpd="sng" algn="ctr">
+          <a:solidFill>
+            <a:schemeClr val="phClr"/>
+          </a:solidFill>
+          <a:prstDash val="solid"/>
+          <a:miter lim="800000"/>
+        </a:ln>
+        <a:ln w="19050" cap="flat" cmpd="sng" algn="ctr">
+          <a:solidFill>
+            <a:schemeClr val="phClr"/>
+          </a:solidFill>
+          <a:prstDash val="solid"/>
+          <a:miter lim="800000"/>
+        </a:ln>
+        <a:ln w="25400" cap="flat" cmpd="sng" algn="ctr">
+          <a:solidFill>
+            <a:schemeClr val="phClr"/>
+          </a:solidFill>
+          <a:prstDash val="solid"/>
+          <a:miter lim="800000"/>
+        </a:ln>
+      </a:lnStyleLst>
+      <a:effectStyleLst>
+        <a:effectStyle>
+          <a:effectLst/>
+        </a:effectStyle>
+        <a:effectStyle>
+          <a:effectLst/>
+        </a:effectStyle>
+        <a:effectStyle>
+          <a:effectLst>
+            <a:outerShdw blurRad="57150" dist="19050" dir="5400000" algn="ctr" rotWithShape="0">
+              <a:srgbClr val="000000">
+                <a:alpha val="63000"/>
+              </a:srgbClr>
+            </a:outerShdw>
+          </a:effectLst>
+        </a:effectStyle>
+      </a:effectStyleLst>
+      <a:bgFillStyleLst>
+        <a:solidFill>
+          <a:schemeClr val="phClr"/>
+        </a:solidFill>
+        <a:solidFill>
+          <a:schemeClr val="phClr">
+            <a:tint val="95000"/>
+            <a:satMod val="170000"/>
+          </a:schemeClr>
+        </a:solidFill>
+        <a:gradFill rotWithShape="1">
+          <a:gsLst>
+            <a:gs pos="0">
+              <a:schemeClr val="phClr">
+                <a:tint val="93000"/>
+                <a:satMod val="150000"/>
+                <a:shade val="98000"/>
+                <a:lumMod val="102000"/>
+              </a:schemeClr>
+            </a:gs>
+            <a:gs pos="50000">
+              <a:schemeClr val="phClr">
+                <a:tint val="98000"/>
+                <a:satMod val="130000"/>
+                <a:shade val="90000"/>
+                <a:lumMod val="103000"/>
+              </a:schemeClr>
+            </a:gs>
+            <a:gs pos="100000">
+              <a:schemeClr val="phClr">
+                <a:shade val="63000"/>
+                <a:satMod val="120000"/>
+              </a:schemeClr>
+            </a:gs>
+          </a:gsLst>
+          <a:lin ang="5400000" scaled="0"/>
+        </a:gradFill>
+      </a:bgFillStyleLst>
+    </a:fmtScheme>
+  </a:themeElements>
+  <a:objectDefaults>
+    <a:lnDef>
+      <a:spPr/>
+      <a:bodyPr/>
+      <a:lstStyle/>
+      <a:style>
+        <a:lnRef idx="2">
+          <a:schemeClr val="accent1"/>
+        </a:lnRef>
+        <a:fillRef idx="0">
+          <a:schemeClr val="accent1"/>
+        </a:fillRef>
+        <a:effectRef idx="1">
+          <a:schemeClr val="accent1"/>
+        </a:effectRef>
+        <a:fontRef idx="minor">
+          <a:schemeClr val="tx1"/>
+        </a:fontRef>
+      </a:style>
+    </a:lnDef>
+  </a:objectDefaults>
+  <a:extraClrSchemeLst/>
+  <a:extLst>
+    <a:ext uri="{05A4C25C-085E-4340-85A3-A5531E510DB2}">
+      <thm15:themeFamily xmlns:thm15="http://schemas.microsoft.com/office/thememl/2012/main" name="Office Theme" id="{2E142A2C-CD16-42D6-873A-C26D2A0506FA}" vid="{1BDDFF52-6CD6-40A5-AB3C-68EB2F1E4D0A}"/>
+    </a:ext>
+  </a:extLst>
+</a:theme>
 </file>